--- a/en/slides/15-Computer_Architecture-Memory.pptx
+++ b/en/slides/15-Computer_Architecture-Memory.pptx
@@ -126,31 +126,31 @@
   <p:extLst>
     <p:ext uri="{521415D9-36F7-43E2-AB2F-B90AF26B5E84}">
       <p14:sectionLst xmlns:p14="http://schemas.microsoft.com/office/powerpoint/2010/main">
-        <p14:section name="Opening" id="{f35ed6a2-b6e9-424f-a469-69a9c19494cc}">
+        <p14:section name="Opening" id="{d1d35807-0a2b-556c-036b-eb40c7d6e938}">
           <p14:sldIdLst>
             <p14:sldId id="256"/>
             <p14:sldId id="257"/>
           </p14:sldIdLst>
         </p14:section>
-        <p14:section name="What is a memory?" id="{5fc621c4-254e-bb7c-81dd-2d30167447df}">
+        <p14:section name="What is a memory?" id="{8bd8d3b7-6f21-0f62-c559-b9ba62a549f4}">
           <p14:sldIdLst>
             <p14:sldId id="258"/>
             <p14:sldId id="259"/>
           </p14:sldIdLst>
         </p14:section>
-        <p14:section name="A little history" id="{f2218546-3311-d522-e056-5c558a67b8c0}">
+        <p14:section name="A little history" id="{556493a9-ea01-ebb0-b5a5-4af038378795}">
           <p14:sldIdLst>
             <p14:sldId id="260"/>
             <p14:sldId id="261"/>
           </p14:sldIdLst>
         </p14:section>
-        <p14:section name="Memory today" id="{6d58ad09-2685-2ec7-8211-9accafbb3aef}">
+        <p14:section name="Memory today" id="{e39e474e-09d8-8019-64f4-175c87a2c4b4}">
           <p14:sldIdLst>
             <p14:sldId id="262"/>
             <p14:sldId id="263"/>
           </p14:sldIdLst>
         </p14:section>
-        <p14:section name="The main memory" id="{5e782409-c703-d99e-a585-9a0f53da48a0}">
+        <p14:section name="The main memory" id="{4ce695e2-6372-46cd-e3d1-efece66fa296}">
           <p14:sldIdLst>
             <p14:sldId id="264"/>
             <p14:sldId id="265"/>
@@ -158,13 +158,13 @@
             <p14:sldId id="267"/>
           </p14:sldIdLst>
         </p14:section>
-        <p14:section name="Processor and memory" id="{0a1828f0-97a9-c317-be0b-a1dec837ce82}">
+        <p14:section name="Processor and memory" id="{fd645a41-dc20-2e51-4937-887b40e2b517}">
           <p14:sldIdLst>
             <p14:sldId id="268"/>
             <p14:sldId id="269"/>
           </p14:sldIdLst>
         </p14:section>
-        <p14:section name="Memory and input/output" id="{1a3caa1f-59c7-7d66-40ba-faa2d6a64898}">
+        <p14:section name="Memory and input/output" id="{e7faed73-e727-da7b-8efe-b91b48fd4711}">
           <p14:sldIdLst>
             <p14:sldId id="270"/>
             <p14:sldId id="271"/>
@@ -1915,7 +1915,8 @@
             <a:r>
               <a:rPr lang="en-US" dirty="0"/>
               <a:t>In a magnetic-core memory each bit is a small ring of ferrite, and its value is the direction of the magnetic field in the ring. It was the main memory of the computers of the 1950s and 1960s, and it kept its content without power. The research began with An Wang at Harvard in 1949; Jay Forrester at MIT made it practical for the Whirlwind computer. Look at the photograph: every ring is threaded by wires, and one ring is one bit.
-For the lecturer: Memorie a nuclei di ferrite. Wang's pulse transfer controlling device used a magnetic field to control an electromechanical system.</a:t>
+For the lecturer: Memorie a nuclei di ferrite. Wang's pulse transfer controlling device used a magnetic field to control an electromechanical system.
+Pictures: HP 9101A extended memory unit.- magnetic core memory module - macro detail.jpg, Mister rf, CC BY-SA 4.0, Wikimedia Commons.</a:t>
             </a:r>
             <a:endParaRPr lang="en-US" dirty="0"/>
           </a:p>
@@ -2182,7 +2183,8 @@
             <a:r>
               <a:rPr lang="en-US" dirty="0"/>
               <a:t>Other technologies. Ferroelectric RAM keeps its state without power. Flash memory is persistent and is erased in blocks: it is the memory of USB keys, phones and solid-state disks. One line concerns your kit directly: in a microcontroller the program lives in flash and the variables in SRAM. That is why your cartridges have a section of constants and a section of variables. The memory modules of a PC have gone, over the years, from a few megabytes to tens of gigabytes each.
-For the lecturer: The module pictures of the original deck (SIMM EDO, SDRAM PC100 32 MB, PC133 64 MB, Rambus PC800 128 MB, DDR PC2100, ECC registered 256 MB) are summarised here. Flash and solid-state disks are treated in the next lecture.</a:t>
+For the lecturer: The module pictures of the original deck (SIMM EDO, SDRAM PC100 32 MB, PC133 64 MB, Rambus PC800 128 MB, DDR PC2100, ECC registered 256 MB) are summarised here. Flash and solid-state disks are treated in the next lecture.
+Pictures: Platinen-001 hg.jpg, Hannes Grobe, CC BY-SA 4.0, Wikimedia Commons.</a:t>
             </a:r>
             <a:endParaRPr lang="en-US" dirty="0"/>
           </a:p>
@@ -3301,7 +3303,63 @@
       </p:sp>
       <p:sp>
         <p:nvSpPr>
-          <p:cNvPr id="12" name="Shape 10"/>
+          <p:cNvPr id="12" name="Text 10"/>
+          <p:cNvSpPr txBox="1"/>
+          <p:nvPr/>
+        </p:nvSpPr>
+        <p:spPr>
+          <a:xfrm>
+            <a:off x="4693615" y="566928"/>
+            <a:ext cx="6949440" cy="640080"/>
+          </a:xfrm>
+          <a:prstGeom prst="rect">
+            <a:avLst/>
+          </a:prstGeom>
+          <a:noFill/>
+          <a:ln/>
+        </p:spPr>
+        <p:txBody>
+          <a:bodyPr wrap="square" lIns="0" tIns="0" rIns="0" bIns="0" rtlCol="0" anchor="t"/>
+          <a:lstStyle/>
+          <a:p>
+            <a:pPr algn="r" indent="0" marL="0">
+              <a:buNone/>
+            </a:pPr>
+            <a:r>
+              <a:rPr lang="en-US" sz="1300" dirty="0">
+                <a:solidFill>
+                  <a:srgbClr val="CFE3EA"/>
+                </a:solidFill>
+                <a:latin typeface="Calibri" pitchFamily="34" charset="0"/>
+                <a:ea typeface="Calibri" pitchFamily="34" charset="-122"/>
+                <a:cs typeface="Calibri" pitchFamily="34" charset="-120"/>
+              </a:rPr>
+              <a:t>Lecture deck. The listings, the complete program and how to test it are in the code deck:</a:t>
+            </a:r>
+            <a:endParaRPr lang="en-US" sz="1300" dirty="0"/>
+          </a:p>
+          <a:p>
+            <a:pPr algn="r" indent="0" marL="0">
+              <a:buNone/>
+            </a:pPr>
+            <a:r>
+              <a:rPr lang="en-US" sz="1300" dirty="0">
+                <a:solidFill>
+                  <a:srgbClr val="CFE3EA"/>
+                </a:solidFill>
+                <a:latin typeface="Calibri" pitchFamily="34" charset="0"/>
+                <a:ea typeface="Calibri" pitchFamily="34" charset="-122"/>
+                <a:cs typeface="Calibri" pitchFamily="34" charset="-120"/>
+              </a:rPr>
+              <a:t>15-Computer_Architecture-Memory-Code.pptx</a:t>
+            </a:r>
+            <a:endParaRPr lang="en-US" sz="1300" dirty="0"/>
+          </a:p>
+        </p:txBody>
+      </p:sp>
+      <p:sp>
+        <p:nvSpPr>
+          <p:cNvPr id="13" name="Shape 11"/>
           <p:cNvSpPr/>
           <p:nvPr/>
         </p:nvSpPr>
@@ -3328,7 +3386,7 @@
       </p:sp>
       <p:pic>
         <p:nvPicPr>
-          <p:cNvPr id="13" name="Image 0" descr="/Users/raffaelemontella/devel/riscv-prg32/computer-architecture-with-prg32/tools/assets/prg32qt_debugger.png">    </p:cNvPr>
+          <p:cNvPr id="14" name="Image 0" descr="/Users/raffaelemontella/devel/riscv-prg32/computer-architecture-with-prg32/tools/assets/prg32qt_debugger.png">    </p:cNvPr>
           <p:cNvPicPr>
             <a:picLocks noChangeAspect="1"/>
           </p:cNvPicPr>
@@ -15409,8 +15467,8 @@
         </p:blipFill>
         <p:spPr>
           <a:xfrm>
-            <a:off x="7863840" y="2148954"/>
-            <a:ext cx="3779215" cy="2834411"/>
+            <a:off x="7863840" y="2030365"/>
+            <a:ext cx="3779215" cy="3071591"/>
           </a:xfrm>
           <a:prstGeom prst="rect">
             <a:avLst/>
@@ -16863,8 +16921,8 @@
         </p:blipFill>
         <p:spPr>
           <a:xfrm>
-            <a:off x="8381184" y="1417320"/>
-            <a:ext cx="2744527" cy="4297680"/>
+            <a:off x="7863840" y="2323153"/>
+            <a:ext cx="3779215" cy="2486015"/>
           </a:xfrm>
           <a:prstGeom prst="rect">
             <a:avLst/>

--- a/en/slides/15-Computer_Architecture-Memory.pptx
+++ b/en/slides/15-Computer_Architecture-Memory.pptx
@@ -126,31 +126,31 @@
   <p:extLst>
     <p:ext uri="{521415D9-36F7-43E2-AB2F-B90AF26B5E84}">
       <p14:sectionLst xmlns:p14="http://schemas.microsoft.com/office/powerpoint/2010/main">
-        <p14:section name="Opening" id="{d1d35807-0a2b-556c-036b-eb40c7d6e938}">
+        <p14:section name="Opening" id="{0c386ef6-c373-d4b9-e4d0-176f5047e674}">
           <p14:sldIdLst>
             <p14:sldId id="256"/>
             <p14:sldId id="257"/>
           </p14:sldIdLst>
         </p14:section>
-        <p14:section name="What is a memory?" id="{8bd8d3b7-6f21-0f62-c559-b9ba62a549f4}">
+        <p14:section name="What is a memory?" id="{5a968151-379a-7aa0-2b92-981c16d96916}">
           <p14:sldIdLst>
             <p14:sldId id="258"/>
             <p14:sldId id="259"/>
           </p14:sldIdLst>
         </p14:section>
-        <p14:section name="A little history" id="{556493a9-ea01-ebb0-b5a5-4af038378795}">
+        <p14:section name="A little history" id="{f285cb49-f79e-1500-b456-27687fd5cd6c}">
           <p14:sldIdLst>
             <p14:sldId id="260"/>
             <p14:sldId id="261"/>
           </p14:sldIdLst>
         </p14:section>
-        <p14:section name="Memory today" id="{e39e474e-09d8-8019-64f4-175c87a2c4b4}">
+        <p14:section name="Memory today" id="{4d32450f-30a8-b18d-72b2-ce3ce47e4fcb}">
           <p14:sldIdLst>
             <p14:sldId id="262"/>
             <p14:sldId id="263"/>
           </p14:sldIdLst>
         </p14:section>
-        <p14:section name="The main memory" id="{4ce695e2-6372-46cd-e3d1-efece66fa296}">
+        <p14:section name="The main memory" id="{ccf5a06c-fe3b-4c86-1db9-4e4b0e3c3331}">
           <p14:sldIdLst>
             <p14:sldId id="264"/>
             <p14:sldId id="265"/>
@@ -158,13 +158,13 @@
             <p14:sldId id="267"/>
           </p14:sldIdLst>
         </p14:section>
-        <p14:section name="Processor and memory" id="{fd645a41-dc20-2e51-4937-887b40e2b517}">
+        <p14:section name="Processor and memory" id="{45fc9fbc-5b26-f9d8-e4f8-4592e3ffe471}">
           <p14:sldIdLst>
             <p14:sldId id="268"/>
             <p14:sldId id="269"/>
           </p14:sldIdLst>
         </p14:section>
-        <p14:section name="Memory and input/output" id="{e7faed73-e727-da7b-8efe-b91b48fd4711}">
+        <p14:section name="Memory and input/output" id="{fd50d3b3-04fa-5cb2-fc51-cb8acef25790}">
           <p14:sldIdLst>
             <p14:sldId id="270"/>
             <p14:sldId id="271"/>
@@ -579,6 +579,8 @@
             <a:r>
               <a:rPr lang="en-US" dirty="0"/>
               <a:t>You have used memory since the second lecture: every lw and sw reads or writes it. This lecture explains what a memory is, how it is organised, and what actually happens between the processor and the memory when a load is executed. The picture on the cover is the debugger of PRG32-QT, whose memory view will serve as your microscope. The quotation from Tron is a joke with a serious side: a machine with memory can keep a state, and with a state it can do almost anything.
+Learning status: UNDERSTAND NOW, by the end of this lecture you explain it, trace it and apply it on your own; USE NOW, you follow and use the recipe today; how it works inside is explained later, or is not part of the course; UNDERSTAND LATER, recognise the name and what it is for; a later lecture explains it. A slide without a badge is context: a story, an example, a question, an exercise.
+Learning status of this lecture. UNDERSTAND NOW: memories and addresses; little-endian byte order; processor and memory; memory-mapped I/O. USE NOW: the complete program, the PRG32 tools (used, not studied, in this course). UNDERSTAND LATER: nothing. A slide without a badge is context: a story, an example, a question, an exercise.
 For the lecturer: Spiral: lw and lbu on the same word show byte addresses and byte order on a real RISC-V machine; the lecture then explains what a memory is, how it is organised and how the processor talks to it. The original deck used the MC68000 (big-endian, no misaligned words) as its example: RISC-V takes its place.</a:t>
             </a:r>
             <a:endParaRPr lang="en-US" dirty="0"/>
@@ -668,6 +670,7 @@
             <a:r>
               <a:rPr lang="en-US" dirty="0"/>
               <a:t>In a byte-addressable memory the smallest unit with an address is the byte. A word of 32 bits therefore occupies four consecutive addresses, and its address is that of its first byte. The strip shows the word of the warm-up followed by three characters. Two consequences that you have already met: the program counter advances by 4 from one instruction to the next, and the index of an array of words is multiplied by 4. RISC-V has loads and stores for each size: bytes, halfwords and words.
+UNDERSTAND NOW: memories and addresses.
 For the lecturer: Each cell is one byte of eight bits, from the most significant (bit 7) to the least significant (bit 0).</a:t>
             </a:r>
             <a:endParaRPr lang="en-US" dirty="0"/>
@@ -757,6 +760,7 @@
             <a:r>
               <a:rPr lang="en-US" dirty="0"/>
               <a:t>The two orders of the bytes of a word. Little-endian: the least significant byte at the lowest address. Big-endian: the most significant byte first. The same word, 0x10A3E6FF, is shown stored in the two ways. RISC-V is little-endian, like almost every processor in use today; network protocols, for historical reasons, send data big-endian. You notice the difference when you look at memory byte by byte, or when two different machines exchange binary data.
+UNDERSTAND NOW: little-endian byte order.
 For the lecturer: The original deck contrasted the MC68000 (big-endian) with Intel x86 (little-endian); the example values are the same. Also called diretto (little) and inverso (big).</a:t>
             </a:r>
             <a:endParaRPr lang="en-US" dirty="0"/>
@@ -846,6 +850,7 @@
             <a:r>
               <a:rPr lang="en-US" dirty="0"/>
               <a:t>Two parameters describe a memory: the capacity, the number of locations and the bits of each, and the access time. The numbers of the kit are worth remembering: 512 KB of SRAM, 320 KB of ROM, and an external flash of a few megabytes. Of these, the PRG32 menu tells you what is left for your programs: about 98 KB of RAM and 509 KB of flash for cartridges. It is eight times a Commodore 64, and a tiny fraction of a laptop.
+UNDERSTAND NOW: memories and addresses.
 For the lecturer: Values from the ESP32-C6 datasheet and from the PRG32 setup screen (RAM 98K, CART FLASH 509K, CART RAM 32K). A Commodore 64 had 64 KB in all.</a:t>
             </a:r>
             <a:endParaRPr lang="en-US" dirty="0"/>
@@ -935,6 +940,7 @@
             <a:r>
               <a:rPr lang="en-US" dirty="0"/>
               <a:t>The interface. Inside the processor two registers face the memory: MA, the memory address register, and MB, the memory buffer register. Three groups of lines connect them to the memory: the address bus, which goes one way, from the processor to the memory; the data bus, which goes both ways; and the control lines, read enable and write enable, which say what is being requested. MA and MB belong to the model of the processor: they are not among the registers you use in assembly.
+UNDERSTAND NOW: processor and memory.
 For the lecturer: MA and MB are internal registers of the textbook processor model (Lecture 18): they are not among the thirty-two registers a RISC-V programmer sees.</a:t>
             </a:r>
             <a:endParaRPr lang="en-US" dirty="0"/>
@@ -1024,6 +1030,7 @@
             <a:r>
               <a:rPr lang="en-US" dirty="0"/>
               <a:t>How do the processor and the memory agree on when the datum is ready? In the asynchronous technique the memory signals with a line when it has finished, and the processor waits: more complex, but the two can be designed independently. In the synchronous technique a clock paces the operation, which completes within a cycle whose length is chosen according to the speed of the memory: simpler, and the rule inside a single chip.
+UNDERSTAND NOW: processor and memory.
 For the lecturer: The read/write operation itself can be coded in different ways, for example a single R/W line qualified by an enable.</a:t>
             </a:r>
             <a:endParaRPr lang="en-US" dirty="0"/>
@@ -1113,6 +1120,7 @@
             <a:r>
               <a:rPr lang="en-US" dirty="0"/>
               <a:t>Two ways of connecting input and output. With a single bus, memory-mapped I/O, memory and devices share the same address space: a register of a device is read and written like a memory location, with no special instructions. With separate buses, isolated I/O, there are two address spaces and dedicated instructions. RISC-V follows the first way: it has no input or output instructions at all, only loads and stores.
+UNDERSTAND NOW: memory-mapped I/O.
 For the lecturer: The I/O subsystem lets the processor interact with input devices (keyboard, mouse), output devices (screen, printer) and input/output devices (mass storage, network cards, serial ports).</a:t>
             </a:r>
             <a:endParaRPr lang="en-US" dirty="0"/>
@@ -1202,6 +1210,7 @@
             <a:r>
               <a:rPr lang="en-US" dirty="0"/>
               <a:t>The bus is in fact three buses: data, address and control. One more mechanism completes the picture. With direct memory access, DMA, a device exchanges whole blocks of data with the memory directly: the processor starts the transfer and is told when it is over, without copying each word itself. The display of the kit receives every frame in this way, and so does the audio amplifier.
+UNDERSTAND NOW: memory-mapped I/O.
 For the lecturer: If several units share the bus and can access the memory directly, a DMA controller arbitrates. On the ESP32-C6 the SPI and I2S peripherals use DMA to stream the frame buffer and the audio samples.</a:t>
             </a:r>
             <a:endParaRPr lang="en-US" dirty="0"/>
@@ -1649,6 +1658,7 @@
             <a:r>
               <a:rPr lang="en-US" dirty="0"/>
               <a:t>Five conclusions. Memory is the component that keeps the state of data. Different kinds serve different purposes, because none is fast, large and cheap together. Data are stored as words with addresses; RISC-V addresses bytes and orders them little-endian. Access happens by selection on the address bus, transfer on the data bus and control lines. And in RISC-V devices are reached like memory. The next lecture treats the memory that survives when the power is off, and the cache.
+Learning status, recap. UNDERSTAND NOW: memories and addresses; little-endian byte order; processor and memory; memory-mapped I/O. USE NOW: the complete program, the PRG32 tools (used, not studied, in this course). UNDERSTAND LATER: nothing. A slide without a badge is context: a story, an example, a question, an exercise.
 For the lecturer: Next lecture: permanent memory and the cache.</a:t>
             </a:r>
             <a:endParaRPr lang="en-US" dirty="0"/>
@@ -1737,7 +1747,8 @@
           <a:p>
             <a:r>
               <a:rPr lang="en-US" dirty="0"/>
-              <a:t>Memory is the part of a computer dedicated to keeping data and the instructions of programs. Two distinctions classify it. Volatile memories keep the information only while the machine is powered; persistent ones keep it when it is switched off. On-line means that the data are always accessible; off-line means that a medium must first be mounted, like a tape taken from a shelf.</a:t>
+              <a:t>Memory is the part of a computer dedicated to keeping data and the instructions of programs. Two distinctions classify it. Volatile memories keep the information only while the machine is powered; persistent ones keep it when it is switched off. On-line means that the data are always accessible; off-line means that a medium must first be mounted, like a tape taken from a shelf.
+UNDERSTAND NOW: memories and addresses.</a:t>
             </a:r>
             <a:endParaRPr lang="en-US" dirty="0"/>
           </a:p>
@@ -1826,6 +1837,7 @@
             <a:r>
               <a:rPr lang="en-US" dirty="0"/>
               <a:t>The memory hierarchy. At the top the registers, inside the processor; then the cache, the main memory, solid-state and magnetic disks, and finally tapes and removable media. Going up, memories are faster and more expensive per bit; going down, larger and cheaper. The upper levels are volatile, the lower ones persistent. The last line explains why the hierarchy exists: no single technology is fast, large and cheap at once, so a computer combines several.
+UNDERSTAND NOW: memories and addresses.
 For the lecturer: Tipologie di memoria. Typical access times: registers and cache below a nanosecond to a few nanoseconds; DRAM tens of nanoseconds; SSD tens of microseconds; magnetic disks milliseconds; tape seconds to minutes.</a:t>
             </a:r>
             <a:endParaRPr lang="en-US" dirty="0"/>
@@ -2094,6 +2106,7 @@
             <a:r>
               <a:rPr lang="en-US" dirty="0"/>
               <a:t>The two kinds of RAM. In static RAM each bit is held by a bistable circuit like those of Lecture 13: it keeps its value as long as there is power, it is fast, and it needs several transistors per bit, so it is expensive: it is used for caches. In dynamic RAM each bit is a charge in a tiny capacitor behind one transistor: it is dense and cheap, but the charge leaks away, so the content must be refreshed periodically: it is the main memory of laptops and phones. The chip of the kit has only SRAM.
+UNDERSTAND NOW: memories and addresses.
 For the lecturer: DDR4 and DDR5 are generations of SDRAM. The ESP32-C6 has 512 KB of SRAM and no DRAM at all.</a:t>
             </a:r>
             <a:endParaRPr lang="en-US" dirty="0"/>
@@ -2183,6 +2196,7 @@
             <a:r>
               <a:rPr lang="en-US" dirty="0"/>
               <a:t>Other technologies. Ferroelectric RAM keeps its state without power. Flash memory is persistent and is erased in blocks: it is the memory of USB keys, phones and solid-state disks. One line concerns your kit directly: in a microcontroller the program lives in flash and the variables in SRAM. That is why your cartridges have a section of constants and a section of variables. The memory modules of a PC have gone, over the years, from a few megabytes to tens of gigabytes each.
+UNDERSTAND NOW: memories and addresses.
 For the lecturer: The module pictures of the original deck (SIMM EDO, SDRAM PC100 32 MB, PC133 64 MB, Rambus PC800 128 MB, DDR PC2100, ECC registered 256 MB) are summarised here. Flash and solid-state disks are treated in the next lecture.
 Pictures: Platinen-001 hg.jpg, Hannes Grobe, CC BY-SA 4.0, Wikimedia Commons.</a:t>
             </a:r>
@@ -2273,6 +2287,7 @@
             <a:r>
               <a:rPr lang="en-US" dirty="0"/>
               <a:t>The main memory is an array of words, each a string of m bits that the processor reads or writes in a single operation. Each word has an address, a number from 0 to N minus 1 written on n bits, with N equal to 2 to the n. The address is a code word, and the memory decodes it. Random access means that the access time does not depend on the position: every word is reached equally fast. Thirty-two address bits give four gibibytes of addresses.
+UNDERSTAND NOW: memories and addresses.
 For the lecturer: Thirty-two address bits give 2^32 addresses: 4 GiB. The decoder of Lecture 11 and the small memory of Lecture 14, scaled up.</a:t>
             </a:r>
             <a:endParaRPr lang="en-US" dirty="0"/>
@@ -3410,6 +3425,420 @@
       </p:pic>
       <p:sp>
         <p:nvSpPr>
+          <p:cNvPr id="15" name="Shape 12"/>
+          <p:cNvSpPr/>
+          <p:nvPr/>
+        </p:nvSpPr>
+        <p:spPr>
+          <a:xfrm>
+            <a:off x="9690303" y="91440"/>
+            <a:ext cx="1952752" cy="274320"/>
+          </a:xfrm>
+          <a:prstGeom prst="rect">
+            <a:avLst/>
+          </a:prstGeom>
+          <a:solidFill>
+            <a:srgbClr val="F3E8FF"/>
+          </a:solidFill>
+          <a:ln w="12700">
+            <a:solidFill>
+              <a:srgbClr val="7E22CE"/>
+            </a:solidFill>
+            <a:prstDash val="dash"/>
+          </a:ln>
+        </p:spPr>
+      </p:sp>
+      <p:sp>
+        <p:nvSpPr>
+          <p:cNvPr id="16" name="Shape 13"/>
+          <p:cNvSpPr/>
+          <p:nvPr/>
+        </p:nvSpPr>
+        <p:spPr>
+          <a:xfrm>
+            <a:off x="9717735" y="128016"/>
+            <a:ext cx="45720" cy="45720"/>
+          </a:xfrm>
+          <a:prstGeom prst="rect">
+            <a:avLst/>
+          </a:prstGeom>
+          <a:solidFill>
+            <a:srgbClr val="7E22CE"/>
+          </a:solidFill>
+          <a:ln w="12700">
+            <a:solidFill>
+              <a:srgbClr val="7E22CE"/>
+            </a:solidFill>
+            <a:prstDash val="solid"/>
+          </a:ln>
+        </p:spPr>
+      </p:sp>
+      <p:sp>
+        <p:nvSpPr>
+          <p:cNvPr id="17" name="Shape 14"/>
+          <p:cNvSpPr/>
+          <p:nvPr/>
+        </p:nvSpPr>
+        <p:spPr>
+          <a:xfrm>
+            <a:off x="9717735" y="205740"/>
+            <a:ext cx="45720" cy="45720"/>
+          </a:xfrm>
+          <a:prstGeom prst="rect">
+            <a:avLst/>
+          </a:prstGeom>
+          <a:solidFill>
+            <a:srgbClr val="7E22CE"/>
+          </a:solidFill>
+          <a:ln w="12700">
+            <a:solidFill>
+              <a:srgbClr val="7E22CE"/>
+            </a:solidFill>
+            <a:prstDash val="solid"/>
+          </a:ln>
+        </p:spPr>
+      </p:sp>
+      <p:sp>
+        <p:nvSpPr>
+          <p:cNvPr id="18" name="Shape 15"/>
+          <p:cNvSpPr/>
+          <p:nvPr/>
+        </p:nvSpPr>
+        <p:spPr>
+          <a:xfrm>
+            <a:off x="9717735" y="283464"/>
+            <a:ext cx="45720" cy="45720"/>
+          </a:xfrm>
+          <a:prstGeom prst="rect">
+            <a:avLst/>
+          </a:prstGeom>
+          <a:solidFill>
+            <a:srgbClr val="7E22CE"/>
+          </a:solidFill>
+          <a:ln w="12700">
+            <a:solidFill>
+              <a:srgbClr val="7E22CE"/>
+            </a:solidFill>
+            <a:prstDash val="solid"/>
+          </a:ln>
+        </p:spPr>
+      </p:sp>
+      <p:pic>
+        <p:nvPicPr>
+          <p:cNvPr id="19" name="Image 1" descr="preencoded.png">    </p:cNvPr>
+          <p:cNvPicPr>
+            <a:picLocks noChangeAspect="1"/>
+          </p:cNvPicPr>
+          <p:nvPr/>
+        </p:nvPicPr>
+        <p:blipFill>
+          <a:blip r:embed="rId2"/>
+          <a:stretch>
+            <a:fillRect/>
+          </a:stretch>
+        </p:blipFill>
+        <p:spPr>
+          <a:xfrm>
+            <a:off x="9818319" y="128016"/>
+            <a:ext cx="201168" cy="201168"/>
+          </a:xfrm>
+          <a:prstGeom prst="rect">
+            <a:avLst/>
+          </a:prstGeom>
+        </p:spPr>
+      </p:pic>
+      <p:sp>
+        <p:nvSpPr>
+          <p:cNvPr id="20" name="Text 16"/>
+          <p:cNvSpPr txBox="1"/>
+          <p:nvPr/>
+        </p:nvSpPr>
+        <p:spPr>
+          <a:xfrm>
+            <a:off x="10074351" y="91440"/>
+            <a:ext cx="1532128" cy="274320"/>
+          </a:xfrm>
+          <a:prstGeom prst="rect">
+            <a:avLst/>
+          </a:prstGeom>
+          <a:noFill/>
+          <a:ln/>
+        </p:spPr>
+        <p:txBody>
+          <a:bodyPr wrap="square" lIns="0" tIns="0" rIns="0" bIns="0" rtlCol="0" anchor="ctr"/>
+          <a:lstStyle/>
+          <a:p>
+            <a:pPr indent="0" marL="0">
+              <a:buNone/>
+            </a:pPr>
+            <a:r>
+              <a:rPr lang="en-US" sz="1100" b="1" dirty="0">
+                <a:solidFill>
+                  <a:srgbClr val="6B21A8"/>
+                </a:solidFill>
+                <a:latin typeface="Calibri" pitchFamily="34" charset="0"/>
+                <a:ea typeface="Calibri" pitchFamily="34" charset="-122"/>
+                <a:cs typeface="Calibri" pitchFamily="34" charset="-120"/>
+              </a:rPr>
+              <a:t>UNDERSTAND LATER</a:t>
+            </a:r>
+            <a:endParaRPr lang="en-US" sz="1100" dirty="0"/>
+          </a:p>
+        </p:txBody>
+      </p:sp>
+      <p:sp>
+        <p:nvSpPr>
+          <p:cNvPr id="21" name="Shape 17"/>
+          <p:cNvSpPr/>
+          <p:nvPr/>
+        </p:nvSpPr>
+        <p:spPr>
+          <a:xfrm>
+            <a:off x="8407349" y="91440"/>
+            <a:ext cx="1173226" cy="274320"/>
+          </a:xfrm>
+          <a:prstGeom prst="rect">
+            <a:avLst/>
+          </a:prstGeom>
+          <a:solidFill>
+            <a:srgbClr val="FEF3C7"/>
+          </a:solidFill>
+          <a:ln w="12700">
+            <a:solidFill>
+              <a:srgbClr val="B45309"/>
+            </a:solidFill>
+            <a:prstDash val="solid"/>
+          </a:ln>
+        </p:spPr>
+      </p:sp>
+      <p:sp>
+        <p:nvSpPr>
+          <p:cNvPr id="22" name="Shape 18"/>
+          <p:cNvSpPr/>
+          <p:nvPr/>
+        </p:nvSpPr>
+        <p:spPr>
+          <a:xfrm>
+            <a:off x="8407349" y="91440"/>
+            <a:ext cx="27432" cy="274320"/>
+          </a:xfrm>
+          <a:prstGeom prst="rect">
+            <a:avLst/>
+          </a:prstGeom>
+          <a:solidFill>
+            <a:srgbClr val="B45309"/>
+          </a:solidFill>
+          <a:ln w="12700">
+            <a:solidFill>
+              <a:srgbClr val="B45309"/>
+            </a:solidFill>
+            <a:prstDash val="solid"/>
+          </a:ln>
+        </p:spPr>
+      </p:sp>
+      <p:sp>
+        <p:nvSpPr>
+          <p:cNvPr id="23" name="Shape 19"/>
+          <p:cNvSpPr/>
+          <p:nvPr/>
+        </p:nvSpPr>
+        <p:spPr>
+          <a:xfrm>
+            <a:off x="8462213" y="91440"/>
+            <a:ext cx="27432" cy="274320"/>
+          </a:xfrm>
+          <a:prstGeom prst="rect">
+            <a:avLst/>
+          </a:prstGeom>
+          <a:solidFill>
+            <a:srgbClr val="B45309"/>
+          </a:solidFill>
+          <a:ln w="12700">
+            <a:solidFill>
+              <a:srgbClr val="B45309"/>
+            </a:solidFill>
+            <a:prstDash val="solid"/>
+          </a:ln>
+        </p:spPr>
+      </p:sp>
+      <p:pic>
+        <p:nvPicPr>
+          <p:cNvPr id="24" name="Image 2" descr="preencoded.png">    </p:cNvPr>
+          <p:cNvPicPr>
+            <a:picLocks noChangeAspect="1"/>
+          </p:cNvPicPr>
+          <p:nvPr/>
+        </p:nvPicPr>
+        <p:blipFill>
+          <a:blip r:embed="rId3"/>
+          <a:stretch>
+            <a:fillRect/>
+          </a:stretch>
+        </p:blipFill>
+        <p:spPr>
+          <a:xfrm>
+            <a:off x="8535365" y="128016"/>
+            <a:ext cx="201168" cy="201168"/>
+          </a:xfrm>
+          <a:prstGeom prst="rect">
+            <a:avLst/>
+          </a:prstGeom>
+        </p:spPr>
+      </p:pic>
+      <p:sp>
+        <p:nvSpPr>
+          <p:cNvPr id="25" name="Text 20"/>
+          <p:cNvSpPr txBox="1"/>
+          <p:nvPr/>
+        </p:nvSpPr>
+        <p:spPr>
+          <a:xfrm>
+            <a:off x="8791397" y="91440"/>
+            <a:ext cx="752602" cy="274320"/>
+          </a:xfrm>
+          <a:prstGeom prst="rect">
+            <a:avLst/>
+          </a:prstGeom>
+          <a:noFill/>
+          <a:ln/>
+        </p:spPr>
+        <p:txBody>
+          <a:bodyPr wrap="square" lIns="0" tIns="0" rIns="0" bIns="0" rtlCol="0" anchor="ctr"/>
+          <a:lstStyle/>
+          <a:p>
+            <a:pPr indent="0" marL="0">
+              <a:buNone/>
+            </a:pPr>
+            <a:r>
+              <a:rPr lang="en-US" sz="1100" b="1" dirty="0">
+                <a:solidFill>
+                  <a:srgbClr val="92400E"/>
+                </a:solidFill>
+                <a:latin typeface="Calibri" pitchFamily="34" charset="0"/>
+                <a:ea typeface="Calibri" pitchFamily="34" charset="-122"/>
+                <a:cs typeface="Calibri" pitchFamily="34" charset="-120"/>
+              </a:rPr>
+              <a:t>USE NOW</a:t>
+            </a:r>
+            <a:endParaRPr lang="en-US" sz="1100" dirty="0"/>
+          </a:p>
+        </p:txBody>
+      </p:sp>
+      <p:sp>
+        <p:nvSpPr>
+          <p:cNvPr id="26" name="Shape 21"/>
+          <p:cNvSpPr/>
+          <p:nvPr/>
+        </p:nvSpPr>
+        <p:spPr>
+          <a:xfrm>
+            <a:off x="6518097" y="91440"/>
+            <a:ext cx="1779524" cy="274320"/>
+          </a:xfrm>
+          <a:prstGeom prst="rect">
+            <a:avLst/>
+          </a:prstGeom>
+          <a:solidFill>
+            <a:srgbClr val="E0F2FE"/>
+          </a:solidFill>
+          <a:ln w="12700">
+            <a:solidFill>
+              <a:srgbClr val="0369A1"/>
+            </a:solidFill>
+            <a:prstDash val="solid"/>
+          </a:ln>
+        </p:spPr>
+      </p:sp>
+      <p:sp>
+        <p:nvSpPr>
+          <p:cNvPr id="27" name="Shape 22"/>
+          <p:cNvSpPr/>
+          <p:nvPr/>
+        </p:nvSpPr>
+        <p:spPr>
+          <a:xfrm>
+            <a:off x="6518097" y="91440"/>
+            <a:ext cx="73152" cy="274320"/>
+          </a:xfrm>
+          <a:prstGeom prst="rect">
+            <a:avLst/>
+          </a:prstGeom>
+          <a:solidFill>
+            <a:srgbClr val="0369A1"/>
+          </a:solidFill>
+          <a:ln w="12700">
+            <a:solidFill>
+              <a:srgbClr val="0369A1"/>
+            </a:solidFill>
+            <a:prstDash val="solid"/>
+          </a:ln>
+        </p:spPr>
+      </p:sp>
+      <p:pic>
+        <p:nvPicPr>
+          <p:cNvPr id="28" name="Image 3" descr="preencoded.png">    </p:cNvPr>
+          <p:cNvPicPr>
+            <a:picLocks noChangeAspect="1"/>
+          </p:cNvPicPr>
+          <p:nvPr/>
+        </p:nvPicPr>
+        <p:blipFill>
+          <a:blip r:embed="rId4"/>
+          <a:stretch>
+            <a:fillRect/>
+          </a:stretch>
+        </p:blipFill>
+        <p:spPr>
+          <a:xfrm>
+            <a:off x="6646113" y="128016"/>
+            <a:ext cx="201168" cy="201168"/>
+          </a:xfrm>
+          <a:prstGeom prst="rect">
+            <a:avLst/>
+          </a:prstGeom>
+        </p:spPr>
+      </p:pic>
+      <p:sp>
+        <p:nvSpPr>
+          <p:cNvPr id="29" name="Text 23"/>
+          <p:cNvSpPr txBox="1"/>
+          <p:nvPr/>
+        </p:nvSpPr>
+        <p:spPr>
+          <a:xfrm>
+            <a:off x="6902145" y="91440"/>
+            <a:ext cx="1358900" cy="274320"/>
+          </a:xfrm>
+          <a:prstGeom prst="rect">
+            <a:avLst/>
+          </a:prstGeom>
+          <a:noFill/>
+          <a:ln/>
+        </p:spPr>
+        <p:txBody>
+          <a:bodyPr wrap="square" lIns="0" tIns="0" rIns="0" bIns="0" rtlCol="0" anchor="ctr"/>
+          <a:lstStyle/>
+          <a:p>
+            <a:pPr indent="0" marL="0">
+              <a:buNone/>
+            </a:pPr>
+            <a:r>
+              <a:rPr lang="en-US" sz="1100" b="1" dirty="0">
+                <a:solidFill>
+                  <a:srgbClr val="075985"/>
+                </a:solidFill>
+                <a:latin typeface="Calibri" pitchFamily="34" charset="0"/>
+                <a:ea typeface="Calibri" pitchFamily="34" charset="-122"/>
+                <a:cs typeface="Calibri" pitchFamily="34" charset="-120"/>
+              </a:rPr>
+              <a:t>UNDERSTAND NOW</a:t>
+            </a:r>
+            <a:endParaRPr lang="en-US" sz="1100" dirty="0"/>
+          </a:p>
+        </p:txBody>
+      </p:sp>
+      <p:sp>
+        <p:nvSpPr>
           <p:cNvPr id="25" name="Slide Number Placeholder 0"/>
           <p:cNvSpPr>
             <a:spLocks noGrp="1"/>
@@ -4570,6 +4999,133 @@
       </p:sp>
       <p:sp>
         <p:nvSpPr>
+          <p:cNvPr id="30" name="Shape 28"/>
+          <p:cNvSpPr/>
+          <p:nvPr/>
+        </p:nvSpPr>
+        <p:spPr>
+          <a:xfrm>
+            <a:off x="8222056" y="91440"/>
+            <a:ext cx="3420999" cy="274320"/>
+          </a:xfrm>
+          <a:prstGeom prst="rect">
+            <a:avLst/>
+          </a:prstGeom>
+          <a:solidFill>
+            <a:srgbClr val="E0F2FE"/>
+          </a:solidFill>
+          <a:ln w="12700">
+            <a:solidFill>
+              <a:srgbClr val="0369A1"/>
+            </a:solidFill>
+            <a:prstDash val="solid"/>
+          </a:ln>
+        </p:spPr>
+      </p:sp>
+      <p:sp>
+        <p:nvSpPr>
+          <p:cNvPr id="31" name="Shape 29"/>
+          <p:cNvSpPr/>
+          <p:nvPr/>
+        </p:nvSpPr>
+        <p:spPr>
+          <a:xfrm>
+            <a:off x="8222056" y="91440"/>
+            <a:ext cx="73152" cy="274320"/>
+          </a:xfrm>
+          <a:prstGeom prst="rect">
+            <a:avLst/>
+          </a:prstGeom>
+          <a:solidFill>
+            <a:srgbClr val="0369A1"/>
+          </a:solidFill>
+          <a:ln w="12700">
+            <a:solidFill>
+              <a:srgbClr val="0369A1"/>
+            </a:solidFill>
+            <a:prstDash val="solid"/>
+          </a:ln>
+        </p:spPr>
+      </p:sp>
+      <p:pic>
+        <p:nvPicPr>
+          <p:cNvPr id="32" name="Image 0" descr="preencoded.png">    </p:cNvPr>
+          <p:cNvPicPr>
+            <a:picLocks noChangeAspect="1"/>
+          </p:cNvPicPr>
+          <p:nvPr/>
+        </p:nvPicPr>
+        <p:blipFill>
+          <a:blip r:embed="rId1"/>
+          <a:stretch>
+            <a:fillRect/>
+          </a:stretch>
+        </p:blipFill>
+        <p:spPr>
+          <a:xfrm>
+            <a:off x="8350072" y="128016"/>
+            <a:ext cx="201168" cy="201168"/>
+          </a:xfrm>
+          <a:prstGeom prst="rect">
+            <a:avLst/>
+          </a:prstGeom>
+        </p:spPr>
+      </p:pic>
+      <p:sp>
+        <p:nvSpPr>
+          <p:cNvPr id="33" name="Text 30"/>
+          <p:cNvSpPr txBox="1"/>
+          <p:nvPr/>
+        </p:nvSpPr>
+        <p:spPr>
+          <a:xfrm>
+            <a:off x="8606104" y="91440"/>
+            <a:ext cx="3000375" cy="274320"/>
+          </a:xfrm>
+          <a:prstGeom prst="rect">
+            <a:avLst/>
+          </a:prstGeom>
+          <a:noFill/>
+          <a:ln/>
+        </p:spPr>
+        <p:txBody>
+          <a:bodyPr wrap="square" lIns="0" tIns="0" rIns="0" bIns="0" rtlCol="0" anchor="ctr"/>
+          <a:lstStyle/>
+          <a:p>
+            <a:pPr indent="0" marL="0">
+              <a:buNone/>
+            </a:pPr>
+            <a:r>
+              <a:rPr lang="en-US" sz="1100" b="1" dirty="0">
+                <a:solidFill>
+                  <a:srgbClr val="075985"/>
+                </a:solidFill>
+                <a:latin typeface="Calibri" pitchFamily="34" charset="0"/>
+                <a:ea typeface="Calibri" pitchFamily="34" charset="-122"/>
+                <a:cs typeface="Calibri" pitchFamily="34" charset="-120"/>
+              </a:rPr>
+              <a:t>UNDERSTAND NOW</a:t>
+            </a:r>
+            <a:pPr indent="0" marL="0">
+              <a:buNone/>
+            </a:pPr>
+            <a:r>
+              <a:rPr lang="en-US" sz="1100" dirty="0">
+                <a:solidFill>
+                  <a:srgbClr val="075985"/>
+                </a:solidFill>
+                <a:latin typeface="Calibri" pitchFamily="34" charset="0"/>
+                <a:ea typeface="Calibri" pitchFamily="34" charset="-122"/>
+                <a:cs typeface="Calibri" pitchFamily="34" charset="-120"/>
+              </a:rPr>
+              <a:t> · memories and addresses</a:t>
+            </a:r>
+            <a:endParaRPr lang="en-US" sz="1100" dirty="0"/>
+          </a:p>
+        </p:txBody>
+      </p:sp>
+      <p:sp>
+        <p:nvSpPr>
           <p:cNvPr id="25" name="Slide Number Placeholder 0"/>
           <p:cNvSpPr>
             <a:spLocks noGrp="1"/>
@@ -5708,6 +6264,133 @@
       </p:sp>
       <p:sp>
         <p:nvSpPr>
+          <p:cNvPr id="28" name="Shape 26"/>
+          <p:cNvSpPr/>
+          <p:nvPr/>
+        </p:nvSpPr>
+        <p:spPr>
+          <a:xfrm>
+            <a:off x="8090738" y="91440"/>
+            <a:ext cx="3552317" cy="274320"/>
+          </a:xfrm>
+          <a:prstGeom prst="rect">
+            <a:avLst/>
+          </a:prstGeom>
+          <a:solidFill>
+            <a:srgbClr val="E0F2FE"/>
+          </a:solidFill>
+          <a:ln w="12700">
+            <a:solidFill>
+              <a:srgbClr val="0369A1"/>
+            </a:solidFill>
+            <a:prstDash val="solid"/>
+          </a:ln>
+        </p:spPr>
+      </p:sp>
+      <p:sp>
+        <p:nvSpPr>
+          <p:cNvPr id="29" name="Shape 27"/>
+          <p:cNvSpPr/>
+          <p:nvPr/>
+        </p:nvSpPr>
+        <p:spPr>
+          <a:xfrm>
+            <a:off x="8090738" y="91440"/>
+            <a:ext cx="73152" cy="274320"/>
+          </a:xfrm>
+          <a:prstGeom prst="rect">
+            <a:avLst/>
+          </a:prstGeom>
+          <a:solidFill>
+            <a:srgbClr val="0369A1"/>
+          </a:solidFill>
+          <a:ln w="12700">
+            <a:solidFill>
+              <a:srgbClr val="0369A1"/>
+            </a:solidFill>
+            <a:prstDash val="solid"/>
+          </a:ln>
+        </p:spPr>
+      </p:sp>
+      <p:pic>
+        <p:nvPicPr>
+          <p:cNvPr id="30" name="Image 0" descr="preencoded.png">    </p:cNvPr>
+          <p:cNvPicPr>
+            <a:picLocks noChangeAspect="1"/>
+          </p:cNvPicPr>
+          <p:nvPr/>
+        </p:nvPicPr>
+        <p:blipFill>
+          <a:blip r:embed="rId1"/>
+          <a:stretch>
+            <a:fillRect/>
+          </a:stretch>
+        </p:blipFill>
+        <p:spPr>
+          <a:xfrm>
+            <a:off x="8218754" y="128016"/>
+            <a:ext cx="201168" cy="201168"/>
+          </a:xfrm>
+          <a:prstGeom prst="rect">
+            <a:avLst/>
+          </a:prstGeom>
+        </p:spPr>
+      </p:pic>
+      <p:sp>
+        <p:nvSpPr>
+          <p:cNvPr id="31" name="Text 28"/>
+          <p:cNvSpPr txBox="1"/>
+          <p:nvPr/>
+        </p:nvSpPr>
+        <p:spPr>
+          <a:xfrm>
+            <a:off x="8474786" y="91440"/>
+            <a:ext cx="3131693" cy="274320"/>
+          </a:xfrm>
+          <a:prstGeom prst="rect">
+            <a:avLst/>
+          </a:prstGeom>
+          <a:noFill/>
+          <a:ln/>
+        </p:spPr>
+        <p:txBody>
+          <a:bodyPr wrap="square" lIns="0" tIns="0" rIns="0" bIns="0" rtlCol="0" anchor="ctr"/>
+          <a:lstStyle/>
+          <a:p>
+            <a:pPr indent="0" marL="0">
+              <a:buNone/>
+            </a:pPr>
+            <a:r>
+              <a:rPr lang="en-US" sz="1100" b="1" dirty="0">
+                <a:solidFill>
+                  <a:srgbClr val="075985"/>
+                </a:solidFill>
+                <a:latin typeface="Calibri" pitchFamily="34" charset="0"/>
+                <a:ea typeface="Calibri" pitchFamily="34" charset="-122"/>
+                <a:cs typeface="Calibri" pitchFamily="34" charset="-120"/>
+              </a:rPr>
+              <a:t>UNDERSTAND NOW</a:t>
+            </a:r>
+            <a:pPr indent="0" marL="0">
+              <a:buNone/>
+            </a:pPr>
+            <a:r>
+              <a:rPr lang="en-US" sz="1100" dirty="0">
+                <a:solidFill>
+                  <a:srgbClr val="075985"/>
+                </a:solidFill>
+                <a:latin typeface="Calibri" pitchFamily="34" charset="0"/>
+                <a:ea typeface="Calibri" pitchFamily="34" charset="-122"/>
+                <a:cs typeface="Calibri" pitchFamily="34" charset="-120"/>
+              </a:rPr>
+              <a:t> · little-endian byte order</a:t>
+            </a:r>
+            <a:endParaRPr lang="en-US" sz="1100" dirty="0"/>
+          </a:p>
+        </p:txBody>
+      </p:sp>
+      <p:sp>
+        <p:nvSpPr>
           <p:cNvPr id="25" name="Slide Number Placeholder 0"/>
           <p:cNvSpPr>
             <a:spLocks noGrp="1"/>
@@ -6235,6 +6918,133 @@
       </p:sp>
       <p:sp>
         <p:nvSpPr>
+          <p:cNvPr id="14" name="Shape 12"/>
+          <p:cNvSpPr/>
+          <p:nvPr/>
+        </p:nvSpPr>
+        <p:spPr>
+          <a:xfrm>
+            <a:off x="8222056" y="91440"/>
+            <a:ext cx="3420999" cy="274320"/>
+          </a:xfrm>
+          <a:prstGeom prst="rect">
+            <a:avLst/>
+          </a:prstGeom>
+          <a:solidFill>
+            <a:srgbClr val="E0F2FE"/>
+          </a:solidFill>
+          <a:ln w="12700">
+            <a:solidFill>
+              <a:srgbClr val="0369A1"/>
+            </a:solidFill>
+            <a:prstDash val="solid"/>
+          </a:ln>
+        </p:spPr>
+      </p:sp>
+      <p:sp>
+        <p:nvSpPr>
+          <p:cNvPr id="15" name="Shape 13"/>
+          <p:cNvSpPr/>
+          <p:nvPr/>
+        </p:nvSpPr>
+        <p:spPr>
+          <a:xfrm>
+            <a:off x="8222056" y="91440"/>
+            <a:ext cx="73152" cy="274320"/>
+          </a:xfrm>
+          <a:prstGeom prst="rect">
+            <a:avLst/>
+          </a:prstGeom>
+          <a:solidFill>
+            <a:srgbClr val="0369A1"/>
+          </a:solidFill>
+          <a:ln w="12700">
+            <a:solidFill>
+              <a:srgbClr val="0369A1"/>
+            </a:solidFill>
+            <a:prstDash val="solid"/>
+          </a:ln>
+        </p:spPr>
+      </p:sp>
+      <p:pic>
+        <p:nvPicPr>
+          <p:cNvPr id="16" name="Image 0" descr="preencoded.png">    </p:cNvPr>
+          <p:cNvPicPr>
+            <a:picLocks noChangeAspect="1"/>
+          </p:cNvPicPr>
+          <p:nvPr/>
+        </p:nvPicPr>
+        <p:blipFill>
+          <a:blip r:embed="rId1"/>
+          <a:stretch>
+            <a:fillRect/>
+          </a:stretch>
+        </p:blipFill>
+        <p:spPr>
+          <a:xfrm>
+            <a:off x="8350072" y="128016"/>
+            <a:ext cx="201168" cy="201168"/>
+          </a:xfrm>
+          <a:prstGeom prst="rect">
+            <a:avLst/>
+          </a:prstGeom>
+        </p:spPr>
+      </p:pic>
+      <p:sp>
+        <p:nvSpPr>
+          <p:cNvPr id="17" name="Text 14"/>
+          <p:cNvSpPr txBox="1"/>
+          <p:nvPr/>
+        </p:nvSpPr>
+        <p:spPr>
+          <a:xfrm>
+            <a:off x="8606104" y="91440"/>
+            <a:ext cx="3000375" cy="274320"/>
+          </a:xfrm>
+          <a:prstGeom prst="rect">
+            <a:avLst/>
+          </a:prstGeom>
+          <a:noFill/>
+          <a:ln/>
+        </p:spPr>
+        <p:txBody>
+          <a:bodyPr wrap="square" lIns="0" tIns="0" rIns="0" bIns="0" rtlCol="0" anchor="ctr"/>
+          <a:lstStyle/>
+          <a:p>
+            <a:pPr indent="0" marL="0">
+              <a:buNone/>
+            </a:pPr>
+            <a:r>
+              <a:rPr lang="en-US" sz="1100" b="1" dirty="0">
+                <a:solidFill>
+                  <a:srgbClr val="075985"/>
+                </a:solidFill>
+                <a:latin typeface="Calibri" pitchFamily="34" charset="0"/>
+                <a:ea typeface="Calibri" pitchFamily="34" charset="-122"/>
+                <a:cs typeface="Calibri" pitchFamily="34" charset="-120"/>
+              </a:rPr>
+              <a:t>UNDERSTAND NOW</a:t>
+            </a:r>
+            <a:pPr indent="0" marL="0">
+              <a:buNone/>
+            </a:pPr>
+            <a:r>
+              <a:rPr lang="en-US" sz="1100" dirty="0">
+                <a:solidFill>
+                  <a:srgbClr val="075985"/>
+                </a:solidFill>
+                <a:latin typeface="Calibri" pitchFamily="34" charset="0"/>
+                <a:ea typeface="Calibri" pitchFamily="34" charset="-122"/>
+                <a:cs typeface="Calibri" pitchFamily="34" charset="-120"/>
+              </a:rPr>
+              <a:t> · memories and addresses</a:t>
+            </a:r>
+            <a:endParaRPr lang="en-US" sz="1100" dirty="0"/>
+          </a:p>
+        </p:txBody>
+      </p:sp>
+      <p:sp>
+        <p:nvSpPr>
           <p:cNvPr id="25" name="Slide Number Placeholder 0"/>
           <p:cNvSpPr>
             <a:spLocks noGrp="1"/>
@@ -6930,6 +7740,133 @@
       </p:sp>
       <p:sp>
         <p:nvSpPr>
+          <p:cNvPr id="18" name="Shape 16"/>
+          <p:cNvSpPr/>
+          <p:nvPr/>
+        </p:nvSpPr>
+        <p:spPr>
+          <a:xfrm>
+            <a:off x="8353374" y="91440"/>
+            <a:ext cx="3289681" cy="274320"/>
+          </a:xfrm>
+          <a:prstGeom prst="rect">
+            <a:avLst/>
+          </a:prstGeom>
+          <a:solidFill>
+            <a:srgbClr val="E0F2FE"/>
+          </a:solidFill>
+          <a:ln w="12700">
+            <a:solidFill>
+              <a:srgbClr val="0369A1"/>
+            </a:solidFill>
+            <a:prstDash val="solid"/>
+          </a:ln>
+        </p:spPr>
+      </p:sp>
+      <p:sp>
+        <p:nvSpPr>
+          <p:cNvPr id="19" name="Shape 17"/>
+          <p:cNvSpPr/>
+          <p:nvPr/>
+        </p:nvSpPr>
+        <p:spPr>
+          <a:xfrm>
+            <a:off x="8353374" y="91440"/>
+            <a:ext cx="73152" cy="274320"/>
+          </a:xfrm>
+          <a:prstGeom prst="rect">
+            <a:avLst/>
+          </a:prstGeom>
+          <a:solidFill>
+            <a:srgbClr val="0369A1"/>
+          </a:solidFill>
+          <a:ln w="12700">
+            <a:solidFill>
+              <a:srgbClr val="0369A1"/>
+            </a:solidFill>
+            <a:prstDash val="solid"/>
+          </a:ln>
+        </p:spPr>
+      </p:sp>
+      <p:pic>
+        <p:nvPicPr>
+          <p:cNvPr id="20" name="Image 0" descr="preencoded.png">    </p:cNvPr>
+          <p:cNvPicPr>
+            <a:picLocks noChangeAspect="1"/>
+          </p:cNvPicPr>
+          <p:nvPr/>
+        </p:nvPicPr>
+        <p:blipFill>
+          <a:blip r:embed="rId1"/>
+          <a:stretch>
+            <a:fillRect/>
+          </a:stretch>
+        </p:blipFill>
+        <p:spPr>
+          <a:xfrm>
+            <a:off x="8481390" y="128016"/>
+            <a:ext cx="201168" cy="201168"/>
+          </a:xfrm>
+          <a:prstGeom prst="rect">
+            <a:avLst/>
+          </a:prstGeom>
+        </p:spPr>
+      </p:pic>
+      <p:sp>
+        <p:nvSpPr>
+          <p:cNvPr id="21" name="Text 18"/>
+          <p:cNvSpPr txBox="1"/>
+          <p:nvPr/>
+        </p:nvSpPr>
+        <p:spPr>
+          <a:xfrm>
+            <a:off x="8737422" y="91440"/>
+            <a:ext cx="2869057" cy="274320"/>
+          </a:xfrm>
+          <a:prstGeom prst="rect">
+            <a:avLst/>
+          </a:prstGeom>
+          <a:noFill/>
+          <a:ln/>
+        </p:spPr>
+        <p:txBody>
+          <a:bodyPr wrap="square" lIns="0" tIns="0" rIns="0" bIns="0" rtlCol="0" anchor="ctr"/>
+          <a:lstStyle/>
+          <a:p>
+            <a:pPr indent="0" marL="0">
+              <a:buNone/>
+            </a:pPr>
+            <a:r>
+              <a:rPr lang="en-US" sz="1100" b="1" dirty="0">
+                <a:solidFill>
+                  <a:srgbClr val="075985"/>
+                </a:solidFill>
+                <a:latin typeface="Calibri" pitchFamily="34" charset="0"/>
+                <a:ea typeface="Calibri" pitchFamily="34" charset="-122"/>
+                <a:cs typeface="Calibri" pitchFamily="34" charset="-120"/>
+              </a:rPr>
+              <a:t>UNDERSTAND NOW</a:t>
+            </a:r>
+            <a:pPr indent="0" marL="0">
+              <a:buNone/>
+            </a:pPr>
+            <a:r>
+              <a:rPr lang="en-US" sz="1100" dirty="0">
+                <a:solidFill>
+                  <a:srgbClr val="075985"/>
+                </a:solidFill>
+                <a:latin typeface="Calibri" pitchFamily="34" charset="0"/>
+                <a:ea typeface="Calibri" pitchFamily="34" charset="-122"/>
+                <a:cs typeface="Calibri" pitchFamily="34" charset="-120"/>
+              </a:rPr>
+              <a:t> · processor and memory</a:t>
+            </a:r>
+            <a:endParaRPr lang="en-US" sz="1100" dirty="0"/>
+          </a:p>
+        </p:txBody>
+      </p:sp>
+      <p:sp>
+        <p:nvSpPr>
           <p:cNvPr id="25" name="Slide Number Placeholder 0"/>
           <p:cNvSpPr>
             <a:spLocks noGrp="1"/>
@@ -7383,6 +8320,133 @@
       </p:sp>
       <p:sp>
         <p:nvSpPr>
+          <p:cNvPr id="9" name="Shape 7"/>
+          <p:cNvSpPr/>
+          <p:nvPr/>
+        </p:nvSpPr>
+        <p:spPr>
+          <a:xfrm>
+            <a:off x="8353374" y="91440"/>
+            <a:ext cx="3289681" cy="274320"/>
+          </a:xfrm>
+          <a:prstGeom prst="rect">
+            <a:avLst/>
+          </a:prstGeom>
+          <a:solidFill>
+            <a:srgbClr val="E0F2FE"/>
+          </a:solidFill>
+          <a:ln w="12700">
+            <a:solidFill>
+              <a:srgbClr val="0369A1"/>
+            </a:solidFill>
+            <a:prstDash val="solid"/>
+          </a:ln>
+        </p:spPr>
+      </p:sp>
+      <p:sp>
+        <p:nvSpPr>
+          <p:cNvPr id="10" name="Shape 8"/>
+          <p:cNvSpPr/>
+          <p:nvPr/>
+        </p:nvSpPr>
+        <p:spPr>
+          <a:xfrm>
+            <a:off x="8353374" y="91440"/>
+            <a:ext cx="73152" cy="274320"/>
+          </a:xfrm>
+          <a:prstGeom prst="rect">
+            <a:avLst/>
+          </a:prstGeom>
+          <a:solidFill>
+            <a:srgbClr val="0369A1"/>
+          </a:solidFill>
+          <a:ln w="12700">
+            <a:solidFill>
+              <a:srgbClr val="0369A1"/>
+            </a:solidFill>
+            <a:prstDash val="solid"/>
+          </a:ln>
+        </p:spPr>
+      </p:sp>
+      <p:pic>
+        <p:nvPicPr>
+          <p:cNvPr id="11" name="Image 0" descr="preencoded.png">    </p:cNvPr>
+          <p:cNvPicPr>
+            <a:picLocks noChangeAspect="1"/>
+          </p:cNvPicPr>
+          <p:nvPr/>
+        </p:nvPicPr>
+        <p:blipFill>
+          <a:blip r:embed="rId1"/>
+          <a:stretch>
+            <a:fillRect/>
+          </a:stretch>
+        </p:blipFill>
+        <p:spPr>
+          <a:xfrm>
+            <a:off x="8481390" y="128016"/>
+            <a:ext cx="201168" cy="201168"/>
+          </a:xfrm>
+          <a:prstGeom prst="rect">
+            <a:avLst/>
+          </a:prstGeom>
+        </p:spPr>
+      </p:pic>
+      <p:sp>
+        <p:nvSpPr>
+          <p:cNvPr id="12" name="Text 9"/>
+          <p:cNvSpPr txBox="1"/>
+          <p:nvPr/>
+        </p:nvSpPr>
+        <p:spPr>
+          <a:xfrm>
+            <a:off x="8737422" y="91440"/>
+            <a:ext cx="2869057" cy="274320"/>
+          </a:xfrm>
+          <a:prstGeom prst="rect">
+            <a:avLst/>
+          </a:prstGeom>
+          <a:noFill/>
+          <a:ln/>
+        </p:spPr>
+        <p:txBody>
+          <a:bodyPr wrap="square" lIns="0" tIns="0" rIns="0" bIns="0" rtlCol="0" anchor="ctr"/>
+          <a:lstStyle/>
+          <a:p>
+            <a:pPr indent="0" marL="0">
+              <a:buNone/>
+            </a:pPr>
+            <a:r>
+              <a:rPr lang="en-US" sz="1100" b="1" dirty="0">
+                <a:solidFill>
+                  <a:srgbClr val="075985"/>
+                </a:solidFill>
+                <a:latin typeface="Calibri" pitchFamily="34" charset="0"/>
+                <a:ea typeface="Calibri" pitchFamily="34" charset="-122"/>
+                <a:cs typeface="Calibri" pitchFamily="34" charset="-120"/>
+              </a:rPr>
+              <a:t>UNDERSTAND NOW</a:t>
+            </a:r>
+            <a:pPr indent="0" marL="0">
+              <a:buNone/>
+            </a:pPr>
+            <a:r>
+              <a:rPr lang="en-US" sz="1100" dirty="0">
+                <a:solidFill>
+                  <a:srgbClr val="075985"/>
+                </a:solidFill>
+                <a:latin typeface="Calibri" pitchFamily="34" charset="0"/>
+                <a:ea typeface="Calibri" pitchFamily="34" charset="-122"/>
+                <a:cs typeface="Calibri" pitchFamily="34" charset="-120"/>
+              </a:rPr>
+              <a:t> · processor and memory</a:t>
+            </a:r>
+            <a:endParaRPr lang="en-US" sz="1100" dirty="0"/>
+          </a:p>
+        </p:txBody>
+      </p:sp>
+      <p:sp>
+        <p:nvSpPr>
           <p:cNvPr id="25" name="Slide Number Placeholder 0"/>
           <p:cNvSpPr>
             <a:spLocks noGrp="1"/>
@@ -7836,6 +8900,133 @@
       </p:sp>
       <p:sp>
         <p:nvSpPr>
+          <p:cNvPr id="9" name="Shape 7"/>
+          <p:cNvSpPr/>
+          <p:nvPr/>
+        </p:nvSpPr>
+        <p:spPr>
+          <a:xfrm>
+            <a:off x="8550351" y="91440"/>
+            <a:ext cx="3092704" cy="274320"/>
+          </a:xfrm>
+          <a:prstGeom prst="rect">
+            <a:avLst/>
+          </a:prstGeom>
+          <a:solidFill>
+            <a:srgbClr val="E0F2FE"/>
+          </a:solidFill>
+          <a:ln w="12700">
+            <a:solidFill>
+              <a:srgbClr val="0369A1"/>
+            </a:solidFill>
+            <a:prstDash val="solid"/>
+          </a:ln>
+        </p:spPr>
+      </p:sp>
+      <p:sp>
+        <p:nvSpPr>
+          <p:cNvPr id="10" name="Shape 8"/>
+          <p:cNvSpPr/>
+          <p:nvPr/>
+        </p:nvSpPr>
+        <p:spPr>
+          <a:xfrm>
+            <a:off x="8550351" y="91440"/>
+            <a:ext cx="73152" cy="274320"/>
+          </a:xfrm>
+          <a:prstGeom prst="rect">
+            <a:avLst/>
+          </a:prstGeom>
+          <a:solidFill>
+            <a:srgbClr val="0369A1"/>
+          </a:solidFill>
+          <a:ln w="12700">
+            <a:solidFill>
+              <a:srgbClr val="0369A1"/>
+            </a:solidFill>
+            <a:prstDash val="solid"/>
+          </a:ln>
+        </p:spPr>
+      </p:sp>
+      <p:pic>
+        <p:nvPicPr>
+          <p:cNvPr id="11" name="Image 0" descr="preencoded.png">    </p:cNvPr>
+          <p:cNvPicPr>
+            <a:picLocks noChangeAspect="1"/>
+          </p:cNvPicPr>
+          <p:nvPr/>
+        </p:nvPicPr>
+        <p:blipFill>
+          <a:blip r:embed="rId1"/>
+          <a:stretch>
+            <a:fillRect/>
+          </a:stretch>
+        </p:blipFill>
+        <p:spPr>
+          <a:xfrm>
+            <a:off x="8678367" y="128016"/>
+            <a:ext cx="201168" cy="201168"/>
+          </a:xfrm>
+          <a:prstGeom prst="rect">
+            <a:avLst/>
+          </a:prstGeom>
+        </p:spPr>
+      </p:pic>
+      <p:sp>
+        <p:nvSpPr>
+          <p:cNvPr id="12" name="Text 9"/>
+          <p:cNvSpPr txBox="1"/>
+          <p:nvPr/>
+        </p:nvSpPr>
+        <p:spPr>
+          <a:xfrm>
+            <a:off x="8934399" y="91440"/>
+            <a:ext cx="2672080" cy="274320"/>
+          </a:xfrm>
+          <a:prstGeom prst="rect">
+            <a:avLst/>
+          </a:prstGeom>
+          <a:noFill/>
+          <a:ln/>
+        </p:spPr>
+        <p:txBody>
+          <a:bodyPr wrap="square" lIns="0" tIns="0" rIns="0" bIns="0" rtlCol="0" anchor="ctr"/>
+          <a:lstStyle/>
+          <a:p>
+            <a:pPr indent="0" marL="0">
+              <a:buNone/>
+            </a:pPr>
+            <a:r>
+              <a:rPr lang="en-US" sz="1100" b="1" dirty="0">
+                <a:solidFill>
+                  <a:srgbClr val="075985"/>
+                </a:solidFill>
+                <a:latin typeface="Calibri" pitchFamily="34" charset="0"/>
+                <a:ea typeface="Calibri" pitchFamily="34" charset="-122"/>
+                <a:cs typeface="Calibri" pitchFamily="34" charset="-120"/>
+              </a:rPr>
+              <a:t>UNDERSTAND NOW</a:t>
+            </a:r>
+            <a:pPr indent="0" marL="0">
+              <a:buNone/>
+            </a:pPr>
+            <a:r>
+              <a:rPr lang="en-US" sz="1100" dirty="0">
+                <a:solidFill>
+                  <a:srgbClr val="075985"/>
+                </a:solidFill>
+                <a:latin typeface="Calibri" pitchFamily="34" charset="0"/>
+                <a:ea typeface="Calibri" pitchFamily="34" charset="-122"/>
+                <a:cs typeface="Calibri" pitchFamily="34" charset="-120"/>
+              </a:rPr>
+              <a:t> · memory-mapped I/O</a:t>
+            </a:r>
+            <a:endParaRPr lang="en-US" sz="1100" dirty="0"/>
+          </a:p>
+        </p:txBody>
+      </p:sp>
+      <p:sp>
+        <p:nvSpPr>
           <p:cNvPr id="25" name="Slide Number Placeholder 0"/>
           <p:cNvSpPr>
             <a:spLocks noGrp="1"/>
@@ -8246,6 +9437,133 @@
               <a:t>The display of the kit receives each frame this way: the processor does not copy the pixels one by one</a:t>
             </a:r>
             <a:endParaRPr lang="en-US" sz="2400" dirty="0"/>
+          </a:p>
+        </p:txBody>
+      </p:sp>
+      <p:sp>
+        <p:nvSpPr>
+          <p:cNvPr id="9" name="Shape 7"/>
+          <p:cNvSpPr/>
+          <p:nvPr/>
+        </p:nvSpPr>
+        <p:spPr>
+          <a:xfrm>
+            <a:off x="8550351" y="91440"/>
+            <a:ext cx="3092704" cy="274320"/>
+          </a:xfrm>
+          <a:prstGeom prst="rect">
+            <a:avLst/>
+          </a:prstGeom>
+          <a:solidFill>
+            <a:srgbClr val="E0F2FE"/>
+          </a:solidFill>
+          <a:ln w="12700">
+            <a:solidFill>
+              <a:srgbClr val="0369A1"/>
+            </a:solidFill>
+            <a:prstDash val="solid"/>
+          </a:ln>
+        </p:spPr>
+      </p:sp>
+      <p:sp>
+        <p:nvSpPr>
+          <p:cNvPr id="10" name="Shape 8"/>
+          <p:cNvSpPr/>
+          <p:nvPr/>
+        </p:nvSpPr>
+        <p:spPr>
+          <a:xfrm>
+            <a:off x="8550351" y="91440"/>
+            <a:ext cx="73152" cy="274320"/>
+          </a:xfrm>
+          <a:prstGeom prst="rect">
+            <a:avLst/>
+          </a:prstGeom>
+          <a:solidFill>
+            <a:srgbClr val="0369A1"/>
+          </a:solidFill>
+          <a:ln w="12700">
+            <a:solidFill>
+              <a:srgbClr val="0369A1"/>
+            </a:solidFill>
+            <a:prstDash val="solid"/>
+          </a:ln>
+        </p:spPr>
+      </p:sp>
+      <p:pic>
+        <p:nvPicPr>
+          <p:cNvPr id="11" name="Image 0" descr="preencoded.png">    </p:cNvPr>
+          <p:cNvPicPr>
+            <a:picLocks noChangeAspect="1"/>
+          </p:cNvPicPr>
+          <p:nvPr/>
+        </p:nvPicPr>
+        <p:blipFill>
+          <a:blip r:embed="rId1"/>
+          <a:stretch>
+            <a:fillRect/>
+          </a:stretch>
+        </p:blipFill>
+        <p:spPr>
+          <a:xfrm>
+            <a:off x="8678367" y="128016"/>
+            <a:ext cx="201168" cy="201168"/>
+          </a:xfrm>
+          <a:prstGeom prst="rect">
+            <a:avLst/>
+          </a:prstGeom>
+        </p:spPr>
+      </p:pic>
+      <p:sp>
+        <p:nvSpPr>
+          <p:cNvPr id="12" name="Text 9"/>
+          <p:cNvSpPr txBox="1"/>
+          <p:nvPr/>
+        </p:nvSpPr>
+        <p:spPr>
+          <a:xfrm>
+            <a:off x="8934399" y="91440"/>
+            <a:ext cx="2672080" cy="274320"/>
+          </a:xfrm>
+          <a:prstGeom prst="rect">
+            <a:avLst/>
+          </a:prstGeom>
+          <a:noFill/>
+          <a:ln/>
+        </p:spPr>
+        <p:txBody>
+          <a:bodyPr wrap="square" lIns="0" tIns="0" rIns="0" bIns="0" rtlCol="0" anchor="ctr"/>
+          <a:lstStyle/>
+          <a:p>
+            <a:pPr indent="0" marL="0">
+              <a:buNone/>
+            </a:pPr>
+            <a:r>
+              <a:rPr lang="en-US" sz="1100" b="1" dirty="0">
+                <a:solidFill>
+                  <a:srgbClr val="075985"/>
+                </a:solidFill>
+                <a:latin typeface="Calibri" pitchFamily="34" charset="0"/>
+                <a:ea typeface="Calibri" pitchFamily="34" charset="-122"/>
+                <a:cs typeface="Calibri" pitchFamily="34" charset="-120"/>
+              </a:rPr>
+              <a:t>UNDERSTAND NOW</a:t>
+            </a:r>
+            <a:pPr indent="0" marL="0">
+              <a:buNone/>
+            </a:pPr>
+            <a:r>
+              <a:rPr lang="en-US" sz="1100" dirty="0">
+                <a:solidFill>
+                  <a:srgbClr val="075985"/>
+                </a:solidFill>
+                <a:latin typeface="Calibri" pitchFamily="34" charset="0"/>
+                <a:ea typeface="Calibri" pitchFamily="34" charset="-122"/>
+                <a:cs typeface="Calibri" pitchFamily="34" charset="-120"/>
+              </a:rPr>
+              <a:t> · memory-mapped I/O</a:t>
+            </a:r>
+            <a:endParaRPr lang="en-US" sz="1100" dirty="0"/>
           </a:p>
         </p:txBody>
       </p:sp>
@@ -14132,6 +15450,133 @@
       </p:sp>
       <p:sp>
         <p:nvSpPr>
+          <p:cNvPr id="14" name="Shape 12"/>
+          <p:cNvSpPr/>
+          <p:nvPr/>
+        </p:nvSpPr>
+        <p:spPr>
+          <a:xfrm>
+            <a:off x="8222056" y="91440"/>
+            <a:ext cx="3420999" cy="274320"/>
+          </a:xfrm>
+          <a:prstGeom prst="rect">
+            <a:avLst/>
+          </a:prstGeom>
+          <a:solidFill>
+            <a:srgbClr val="E0F2FE"/>
+          </a:solidFill>
+          <a:ln w="12700">
+            <a:solidFill>
+              <a:srgbClr val="0369A1"/>
+            </a:solidFill>
+            <a:prstDash val="solid"/>
+          </a:ln>
+        </p:spPr>
+      </p:sp>
+      <p:sp>
+        <p:nvSpPr>
+          <p:cNvPr id="15" name="Shape 13"/>
+          <p:cNvSpPr/>
+          <p:nvPr/>
+        </p:nvSpPr>
+        <p:spPr>
+          <a:xfrm>
+            <a:off x="8222056" y="91440"/>
+            <a:ext cx="73152" cy="274320"/>
+          </a:xfrm>
+          <a:prstGeom prst="rect">
+            <a:avLst/>
+          </a:prstGeom>
+          <a:solidFill>
+            <a:srgbClr val="0369A1"/>
+          </a:solidFill>
+          <a:ln w="12700">
+            <a:solidFill>
+              <a:srgbClr val="0369A1"/>
+            </a:solidFill>
+            <a:prstDash val="solid"/>
+          </a:ln>
+        </p:spPr>
+      </p:sp>
+      <p:pic>
+        <p:nvPicPr>
+          <p:cNvPr id="16" name="Image 0" descr="preencoded.png">    </p:cNvPr>
+          <p:cNvPicPr>
+            <a:picLocks noChangeAspect="1"/>
+          </p:cNvPicPr>
+          <p:nvPr/>
+        </p:nvPicPr>
+        <p:blipFill>
+          <a:blip r:embed="rId1"/>
+          <a:stretch>
+            <a:fillRect/>
+          </a:stretch>
+        </p:blipFill>
+        <p:spPr>
+          <a:xfrm>
+            <a:off x="8350072" y="128016"/>
+            <a:ext cx="201168" cy="201168"/>
+          </a:xfrm>
+          <a:prstGeom prst="rect">
+            <a:avLst/>
+          </a:prstGeom>
+        </p:spPr>
+      </p:pic>
+      <p:sp>
+        <p:nvSpPr>
+          <p:cNvPr id="17" name="Text 14"/>
+          <p:cNvSpPr txBox="1"/>
+          <p:nvPr/>
+        </p:nvSpPr>
+        <p:spPr>
+          <a:xfrm>
+            <a:off x="8606104" y="91440"/>
+            <a:ext cx="3000375" cy="274320"/>
+          </a:xfrm>
+          <a:prstGeom prst="rect">
+            <a:avLst/>
+          </a:prstGeom>
+          <a:noFill/>
+          <a:ln/>
+        </p:spPr>
+        <p:txBody>
+          <a:bodyPr wrap="square" lIns="0" tIns="0" rIns="0" bIns="0" rtlCol="0" anchor="ctr"/>
+          <a:lstStyle/>
+          <a:p>
+            <a:pPr indent="0" marL="0">
+              <a:buNone/>
+            </a:pPr>
+            <a:r>
+              <a:rPr lang="en-US" sz="1100" b="1" dirty="0">
+                <a:solidFill>
+                  <a:srgbClr val="075985"/>
+                </a:solidFill>
+                <a:latin typeface="Calibri" pitchFamily="34" charset="0"/>
+                <a:ea typeface="Calibri" pitchFamily="34" charset="-122"/>
+                <a:cs typeface="Calibri" pitchFamily="34" charset="-120"/>
+              </a:rPr>
+              <a:t>UNDERSTAND NOW</a:t>
+            </a:r>
+            <a:pPr indent="0" marL="0">
+              <a:buNone/>
+            </a:pPr>
+            <a:r>
+              <a:rPr lang="en-US" sz="1100" dirty="0">
+                <a:solidFill>
+                  <a:srgbClr val="075985"/>
+                </a:solidFill>
+                <a:latin typeface="Calibri" pitchFamily="34" charset="0"/>
+                <a:ea typeface="Calibri" pitchFamily="34" charset="-122"/>
+                <a:cs typeface="Calibri" pitchFamily="34" charset="-120"/>
+              </a:rPr>
+              <a:t> · memories and addresses</a:t>
+            </a:r>
+            <a:endParaRPr lang="en-US" sz="1100" dirty="0"/>
+          </a:p>
+        </p:txBody>
+      </p:sp>
+      <p:sp>
+        <p:nvSpPr>
           <p:cNvPr id="25" name="Slide Number Placeholder 0"/>
           <p:cNvSpPr>
             <a:spLocks noGrp="1"/>
@@ -15004,6 +16449,133 @@
       </p:sp>
       <p:sp>
         <p:nvSpPr>
+          <p:cNvPr id="19" name="Shape 17"/>
+          <p:cNvSpPr/>
+          <p:nvPr/>
+        </p:nvSpPr>
+        <p:spPr>
+          <a:xfrm>
+            <a:off x="8222056" y="91440"/>
+            <a:ext cx="3420999" cy="274320"/>
+          </a:xfrm>
+          <a:prstGeom prst="rect">
+            <a:avLst/>
+          </a:prstGeom>
+          <a:solidFill>
+            <a:srgbClr val="E0F2FE"/>
+          </a:solidFill>
+          <a:ln w="12700">
+            <a:solidFill>
+              <a:srgbClr val="0369A1"/>
+            </a:solidFill>
+            <a:prstDash val="solid"/>
+          </a:ln>
+        </p:spPr>
+      </p:sp>
+      <p:sp>
+        <p:nvSpPr>
+          <p:cNvPr id="20" name="Shape 18"/>
+          <p:cNvSpPr/>
+          <p:nvPr/>
+        </p:nvSpPr>
+        <p:spPr>
+          <a:xfrm>
+            <a:off x="8222056" y="91440"/>
+            <a:ext cx="73152" cy="274320"/>
+          </a:xfrm>
+          <a:prstGeom prst="rect">
+            <a:avLst/>
+          </a:prstGeom>
+          <a:solidFill>
+            <a:srgbClr val="0369A1"/>
+          </a:solidFill>
+          <a:ln w="12700">
+            <a:solidFill>
+              <a:srgbClr val="0369A1"/>
+            </a:solidFill>
+            <a:prstDash val="solid"/>
+          </a:ln>
+        </p:spPr>
+      </p:sp>
+      <p:pic>
+        <p:nvPicPr>
+          <p:cNvPr id="21" name="Image 0" descr="preencoded.png">    </p:cNvPr>
+          <p:cNvPicPr>
+            <a:picLocks noChangeAspect="1"/>
+          </p:cNvPicPr>
+          <p:nvPr/>
+        </p:nvPicPr>
+        <p:blipFill>
+          <a:blip r:embed="rId1"/>
+          <a:stretch>
+            <a:fillRect/>
+          </a:stretch>
+        </p:blipFill>
+        <p:spPr>
+          <a:xfrm>
+            <a:off x="8350072" y="128016"/>
+            <a:ext cx="201168" cy="201168"/>
+          </a:xfrm>
+          <a:prstGeom prst="rect">
+            <a:avLst/>
+          </a:prstGeom>
+        </p:spPr>
+      </p:pic>
+      <p:sp>
+        <p:nvSpPr>
+          <p:cNvPr id="22" name="Text 19"/>
+          <p:cNvSpPr txBox="1"/>
+          <p:nvPr/>
+        </p:nvSpPr>
+        <p:spPr>
+          <a:xfrm>
+            <a:off x="8606104" y="91440"/>
+            <a:ext cx="3000375" cy="274320"/>
+          </a:xfrm>
+          <a:prstGeom prst="rect">
+            <a:avLst/>
+          </a:prstGeom>
+          <a:noFill/>
+          <a:ln/>
+        </p:spPr>
+        <p:txBody>
+          <a:bodyPr wrap="square" lIns="0" tIns="0" rIns="0" bIns="0" rtlCol="0" anchor="ctr"/>
+          <a:lstStyle/>
+          <a:p>
+            <a:pPr indent="0" marL="0">
+              <a:buNone/>
+            </a:pPr>
+            <a:r>
+              <a:rPr lang="en-US" sz="1100" b="1" dirty="0">
+                <a:solidFill>
+                  <a:srgbClr val="075985"/>
+                </a:solidFill>
+                <a:latin typeface="Calibri" pitchFamily="34" charset="0"/>
+                <a:ea typeface="Calibri" pitchFamily="34" charset="-122"/>
+                <a:cs typeface="Calibri" pitchFamily="34" charset="-120"/>
+              </a:rPr>
+              <a:t>UNDERSTAND NOW</a:t>
+            </a:r>
+            <a:pPr indent="0" marL="0">
+              <a:buNone/>
+            </a:pPr>
+            <a:r>
+              <a:rPr lang="en-US" sz="1100" dirty="0">
+                <a:solidFill>
+                  <a:srgbClr val="075985"/>
+                </a:solidFill>
+                <a:latin typeface="Calibri" pitchFamily="34" charset="0"/>
+                <a:ea typeface="Calibri" pitchFamily="34" charset="-122"/>
+                <a:cs typeface="Calibri" pitchFamily="34" charset="-120"/>
+              </a:rPr>
+              <a:t> · memories and addresses</a:t>
+            </a:r>
+            <a:endParaRPr lang="en-US" sz="1100" dirty="0"/>
+          </a:p>
+        </p:txBody>
+      </p:sp>
+      <p:sp>
+        <p:nvSpPr>
           <p:cNvPr id="25" name="Slide Number Placeholder 0"/>
           <p:cNvSpPr>
             <a:spLocks noGrp="1"/>
@@ -16485,6 +18057,133 @@
       </p:sp>
       <p:sp>
         <p:nvSpPr>
+          <p:cNvPr id="9" name="Shape 7"/>
+          <p:cNvSpPr/>
+          <p:nvPr/>
+        </p:nvSpPr>
+        <p:spPr>
+          <a:xfrm>
+            <a:off x="8222056" y="91440"/>
+            <a:ext cx="3420999" cy="274320"/>
+          </a:xfrm>
+          <a:prstGeom prst="rect">
+            <a:avLst/>
+          </a:prstGeom>
+          <a:solidFill>
+            <a:srgbClr val="E0F2FE"/>
+          </a:solidFill>
+          <a:ln w="12700">
+            <a:solidFill>
+              <a:srgbClr val="0369A1"/>
+            </a:solidFill>
+            <a:prstDash val="solid"/>
+          </a:ln>
+        </p:spPr>
+      </p:sp>
+      <p:sp>
+        <p:nvSpPr>
+          <p:cNvPr id="10" name="Shape 8"/>
+          <p:cNvSpPr/>
+          <p:nvPr/>
+        </p:nvSpPr>
+        <p:spPr>
+          <a:xfrm>
+            <a:off x="8222056" y="91440"/>
+            <a:ext cx="73152" cy="274320"/>
+          </a:xfrm>
+          <a:prstGeom prst="rect">
+            <a:avLst/>
+          </a:prstGeom>
+          <a:solidFill>
+            <a:srgbClr val="0369A1"/>
+          </a:solidFill>
+          <a:ln w="12700">
+            <a:solidFill>
+              <a:srgbClr val="0369A1"/>
+            </a:solidFill>
+            <a:prstDash val="solid"/>
+          </a:ln>
+        </p:spPr>
+      </p:sp>
+      <p:pic>
+        <p:nvPicPr>
+          <p:cNvPr id="11" name="Image 0" descr="preencoded.png">    </p:cNvPr>
+          <p:cNvPicPr>
+            <a:picLocks noChangeAspect="1"/>
+          </p:cNvPicPr>
+          <p:nvPr/>
+        </p:nvPicPr>
+        <p:blipFill>
+          <a:blip r:embed="rId1"/>
+          <a:stretch>
+            <a:fillRect/>
+          </a:stretch>
+        </p:blipFill>
+        <p:spPr>
+          <a:xfrm>
+            <a:off x="8350072" y="128016"/>
+            <a:ext cx="201168" cy="201168"/>
+          </a:xfrm>
+          <a:prstGeom prst="rect">
+            <a:avLst/>
+          </a:prstGeom>
+        </p:spPr>
+      </p:pic>
+      <p:sp>
+        <p:nvSpPr>
+          <p:cNvPr id="12" name="Text 9"/>
+          <p:cNvSpPr txBox="1"/>
+          <p:nvPr/>
+        </p:nvSpPr>
+        <p:spPr>
+          <a:xfrm>
+            <a:off x="8606104" y="91440"/>
+            <a:ext cx="3000375" cy="274320"/>
+          </a:xfrm>
+          <a:prstGeom prst="rect">
+            <a:avLst/>
+          </a:prstGeom>
+          <a:noFill/>
+          <a:ln/>
+        </p:spPr>
+        <p:txBody>
+          <a:bodyPr wrap="square" lIns="0" tIns="0" rIns="0" bIns="0" rtlCol="0" anchor="ctr"/>
+          <a:lstStyle/>
+          <a:p>
+            <a:pPr indent="0" marL="0">
+              <a:buNone/>
+            </a:pPr>
+            <a:r>
+              <a:rPr lang="en-US" sz="1100" b="1" dirty="0">
+                <a:solidFill>
+                  <a:srgbClr val="075985"/>
+                </a:solidFill>
+                <a:latin typeface="Calibri" pitchFamily="34" charset="0"/>
+                <a:ea typeface="Calibri" pitchFamily="34" charset="-122"/>
+                <a:cs typeface="Calibri" pitchFamily="34" charset="-120"/>
+              </a:rPr>
+              <a:t>UNDERSTAND NOW</a:t>
+            </a:r>
+            <a:pPr indent="0" marL="0">
+              <a:buNone/>
+            </a:pPr>
+            <a:r>
+              <a:rPr lang="en-US" sz="1100" dirty="0">
+                <a:solidFill>
+                  <a:srgbClr val="075985"/>
+                </a:solidFill>
+                <a:latin typeface="Calibri" pitchFamily="34" charset="0"/>
+                <a:ea typeface="Calibri" pitchFamily="34" charset="-122"/>
+                <a:cs typeface="Calibri" pitchFamily="34" charset="-120"/>
+              </a:rPr>
+              <a:t> · memories and addresses</a:t>
+            </a:r>
+            <a:endParaRPr lang="en-US" sz="1100" dirty="0"/>
+          </a:p>
+        </p:txBody>
+      </p:sp>
+      <p:sp>
+        <p:nvSpPr>
           <p:cNvPr id="25" name="Slide Number Placeholder 0"/>
           <p:cNvSpPr>
             <a:spLocks noGrp="1"/>
@@ -16970,6 +18669,133 @@
       </p:sp>
       <p:sp>
         <p:nvSpPr>
+          <p:cNvPr id="13" name="Shape 10"/>
+          <p:cNvSpPr/>
+          <p:nvPr/>
+        </p:nvSpPr>
+        <p:spPr>
+          <a:xfrm>
+            <a:off x="8222056" y="91440"/>
+            <a:ext cx="3420999" cy="274320"/>
+          </a:xfrm>
+          <a:prstGeom prst="rect">
+            <a:avLst/>
+          </a:prstGeom>
+          <a:solidFill>
+            <a:srgbClr val="E0F2FE"/>
+          </a:solidFill>
+          <a:ln w="12700">
+            <a:solidFill>
+              <a:srgbClr val="0369A1"/>
+            </a:solidFill>
+            <a:prstDash val="solid"/>
+          </a:ln>
+        </p:spPr>
+      </p:sp>
+      <p:sp>
+        <p:nvSpPr>
+          <p:cNvPr id="14" name="Shape 11"/>
+          <p:cNvSpPr/>
+          <p:nvPr/>
+        </p:nvSpPr>
+        <p:spPr>
+          <a:xfrm>
+            <a:off x="8222056" y="91440"/>
+            <a:ext cx="73152" cy="274320"/>
+          </a:xfrm>
+          <a:prstGeom prst="rect">
+            <a:avLst/>
+          </a:prstGeom>
+          <a:solidFill>
+            <a:srgbClr val="0369A1"/>
+          </a:solidFill>
+          <a:ln w="12700">
+            <a:solidFill>
+              <a:srgbClr val="0369A1"/>
+            </a:solidFill>
+            <a:prstDash val="solid"/>
+          </a:ln>
+        </p:spPr>
+      </p:sp>
+      <p:pic>
+        <p:nvPicPr>
+          <p:cNvPr id="15" name="Image 1" descr="preencoded.png">    </p:cNvPr>
+          <p:cNvPicPr>
+            <a:picLocks noChangeAspect="1"/>
+          </p:cNvPicPr>
+          <p:nvPr/>
+        </p:nvPicPr>
+        <p:blipFill>
+          <a:blip r:embed="rId2"/>
+          <a:stretch>
+            <a:fillRect/>
+          </a:stretch>
+        </p:blipFill>
+        <p:spPr>
+          <a:xfrm>
+            <a:off x="8350072" y="128016"/>
+            <a:ext cx="201168" cy="201168"/>
+          </a:xfrm>
+          <a:prstGeom prst="rect">
+            <a:avLst/>
+          </a:prstGeom>
+        </p:spPr>
+      </p:pic>
+      <p:sp>
+        <p:nvSpPr>
+          <p:cNvPr id="16" name="Text 12"/>
+          <p:cNvSpPr txBox="1"/>
+          <p:nvPr/>
+        </p:nvSpPr>
+        <p:spPr>
+          <a:xfrm>
+            <a:off x="8606104" y="91440"/>
+            <a:ext cx="3000375" cy="274320"/>
+          </a:xfrm>
+          <a:prstGeom prst="rect">
+            <a:avLst/>
+          </a:prstGeom>
+          <a:noFill/>
+          <a:ln/>
+        </p:spPr>
+        <p:txBody>
+          <a:bodyPr wrap="square" lIns="0" tIns="0" rIns="0" bIns="0" rtlCol="0" anchor="ctr"/>
+          <a:lstStyle/>
+          <a:p>
+            <a:pPr indent="0" marL="0">
+              <a:buNone/>
+            </a:pPr>
+            <a:r>
+              <a:rPr lang="en-US" sz="1100" b="1" dirty="0">
+                <a:solidFill>
+                  <a:srgbClr val="075985"/>
+                </a:solidFill>
+                <a:latin typeface="Calibri" pitchFamily="34" charset="0"/>
+                <a:ea typeface="Calibri" pitchFamily="34" charset="-122"/>
+                <a:cs typeface="Calibri" pitchFamily="34" charset="-120"/>
+              </a:rPr>
+              <a:t>UNDERSTAND NOW</a:t>
+            </a:r>
+            <a:pPr indent="0" marL="0">
+              <a:buNone/>
+            </a:pPr>
+            <a:r>
+              <a:rPr lang="en-US" sz="1100" dirty="0">
+                <a:solidFill>
+                  <a:srgbClr val="075985"/>
+                </a:solidFill>
+                <a:latin typeface="Calibri" pitchFamily="34" charset="0"/>
+                <a:ea typeface="Calibri" pitchFamily="34" charset="-122"/>
+                <a:cs typeface="Calibri" pitchFamily="34" charset="-120"/>
+              </a:rPr>
+              <a:t> · memories and addresses</a:t>
+            </a:r>
+            <a:endParaRPr lang="en-US" sz="1100" dirty="0"/>
+          </a:p>
+        </p:txBody>
+      </p:sp>
+      <p:sp>
+        <p:nvSpPr>
           <p:cNvPr id="25" name="Slide Number Placeholder 0"/>
           <p:cNvSpPr>
             <a:spLocks noGrp="1"/>
@@ -17519,6 +19345,133 @@
               <a:t>n address bits select one of N locations: the address is a code word, the memory decodes it</a:t>
             </a:r>
             <a:endParaRPr lang="en-US" sz="1900" dirty="0"/>
+          </a:p>
+        </p:txBody>
+      </p:sp>
+      <p:sp>
+        <p:nvSpPr>
+          <p:cNvPr id="16" name="Shape 14"/>
+          <p:cNvSpPr/>
+          <p:nvPr/>
+        </p:nvSpPr>
+        <p:spPr>
+          <a:xfrm>
+            <a:off x="8222056" y="91440"/>
+            <a:ext cx="3420999" cy="274320"/>
+          </a:xfrm>
+          <a:prstGeom prst="rect">
+            <a:avLst/>
+          </a:prstGeom>
+          <a:solidFill>
+            <a:srgbClr val="E0F2FE"/>
+          </a:solidFill>
+          <a:ln w="12700">
+            <a:solidFill>
+              <a:srgbClr val="0369A1"/>
+            </a:solidFill>
+            <a:prstDash val="solid"/>
+          </a:ln>
+        </p:spPr>
+      </p:sp>
+      <p:sp>
+        <p:nvSpPr>
+          <p:cNvPr id="17" name="Shape 15"/>
+          <p:cNvSpPr/>
+          <p:nvPr/>
+        </p:nvSpPr>
+        <p:spPr>
+          <a:xfrm>
+            <a:off x="8222056" y="91440"/>
+            <a:ext cx="73152" cy="274320"/>
+          </a:xfrm>
+          <a:prstGeom prst="rect">
+            <a:avLst/>
+          </a:prstGeom>
+          <a:solidFill>
+            <a:srgbClr val="0369A1"/>
+          </a:solidFill>
+          <a:ln w="12700">
+            <a:solidFill>
+              <a:srgbClr val="0369A1"/>
+            </a:solidFill>
+            <a:prstDash val="solid"/>
+          </a:ln>
+        </p:spPr>
+      </p:sp>
+      <p:pic>
+        <p:nvPicPr>
+          <p:cNvPr id="18" name="Image 0" descr="preencoded.png">    </p:cNvPr>
+          <p:cNvPicPr>
+            <a:picLocks noChangeAspect="1"/>
+          </p:cNvPicPr>
+          <p:nvPr/>
+        </p:nvPicPr>
+        <p:blipFill>
+          <a:blip r:embed="rId1"/>
+          <a:stretch>
+            <a:fillRect/>
+          </a:stretch>
+        </p:blipFill>
+        <p:spPr>
+          <a:xfrm>
+            <a:off x="8350072" y="128016"/>
+            <a:ext cx="201168" cy="201168"/>
+          </a:xfrm>
+          <a:prstGeom prst="rect">
+            <a:avLst/>
+          </a:prstGeom>
+        </p:spPr>
+      </p:pic>
+      <p:sp>
+        <p:nvSpPr>
+          <p:cNvPr id="19" name="Text 16"/>
+          <p:cNvSpPr txBox="1"/>
+          <p:nvPr/>
+        </p:nvSpPr>
+        <p:spPr>
+          <a:xfrm>
+            <a:off x="8606104" y="91440"/>
+            <a:ext cx="3000375" cy="274320"/>
+          </a:xfrm>
+          <a:prstGeom prst="rect">
+            <a:avLst/>
+          </a:prstGeom>
+          <a:noFill/>
+          <a:ln/>
+        </p:spPr>
+        <p:txBody>
+          <a:bodyPr wrap="square" lIns="0" tIns="0" rIns="0" bIns="0" rtlCol="0" anchor="ctr"/>
+          <a:lstStyle/>
+          <a:p>
+            <a:pPr indent="0" marL="0">
+              <a:buNone/>
+            </a:pPr>
+            <a:r>
+              <a:rPr lang="en-US" sz="1100" b="1" dirty="0">
+                <a:solidFill>
+                  <a:srgbClr val="075985"/>
+                </a:solidFill>
+                <a:latin typeface="Calibri" pitchFamily="34" charset="0"/>
+                <a:ea typeface="Calibri" pitchFamily="34" charset="-122"/>
+                <a:cs typeface="Calibri" pitchFamily="34" charset="-120"/>
+              </a:rPr>
+              <a:t>UNDERSTAND NOW</a:t>
+            </a:r>
+            <a:pPr indent="0" marL="0">
+              <a:buNone/>
+            </a:pPr>
+            <a:r>
+              <a:rPr lang="en-US" sz="1100" dirty="0">
+                <a:solidFill>
+                  <a:srgbClr val="075985"/>
+                </a:solidFill>
+                <a:latin typeface="Calibri" pitchFamily="34" charset="0"/>
+                <a:ea typeface="Calibri" pitchFamily="34" charset="-122"/>
+                <a:cs typeface="Calibri" pitchFamily="34" charset="-120"/>
+              </a:rPr>
+              <a:t> · memories and addresses</a:t>
+            </a:r>
+            <a:endParaRPr lang="en-US" sz="1100" dirty="0"/>
           </a:p>
         </p:txBody>
       </p:sp>

--- a/en/slides/15-Computer_Architecture-Memory.pptx
+++ b/en/slides/15-Computer_Architecture-Memory.pptx
@@ -126,31 +126,31 @@
   <p:extLst>
     <p:ext uri="{521415D9-36F7-43E2-AB2F-B90AF26B5E84}">
       <p14:sectionLst xmlns:p14="http://schemas.microsoft.com/office/powerpoint/2010/main">
-        <p14:section name="Opening" id="{0c386ef6-c373-d4b9-e4d0-176f5047e674}">
+        <p14:section name="Opening" id="{879a4a60-59ce-fc88-d949-4b0f9bb1bdf2}">
           <p14:sldIdLst>
             <p14:sldId id="256"/>
             <p14:sldId id="257"/>
           </p14:sldIdLst>
         </p14:section>
-        <p14:section name="What is a memory?" id="{5a968151-379a-7aa0-2b92-981c16d96916}">
+        <p14:section name="What is a memory?" id="{c54148a3-69ad-cd91-8383-85977807517a}">
           <p14:sldIdLst>
             <p14:sldId id="258"/>
             <p14:sldId id="259"/>
           </p14:sldIdLst>
         </p14:section>
-        <p14:section name="A little history" id="{f285cb49-f79e-1500-b456-27687fd5cd6c}">
+        <p14:section name="A little history" id="{ec8fdffa-d0de-dbcd-0295-95e20d1ce4aa}">
           <p14:sldIdLst>
             <p14:sldId id="260"/>
             <p14:sldId id="261"/>
           </p14:sldIdLst>
         </p14:section>
-        <p14:section name="Memory today" id="{4d32450f-30a8-b18d-72b2-ce3ce47e4fcb}">
+        <p14:section name="Memory today" id="{a0172c68-d291-da8c-0d26-662d230df4a6}">
           <p14:sldIdLst>
             <p14:sldId id="262"/>
             <p14:sldId id="263"/>
           </p14:sldIdLst>
         </p14:section>
-        <p14:section name="The main memory" id="{ccf5a06c-fe3b-4c86-1db9-4e4b0e3c3331}">
+        <p14:section name="The main memory" id="{99021003-2ff5-fb86-bac5-c0d19153bc1a}">
           <p14:sldIdLst>
             <p14:sldId id="264"/>
             <p14:sldId id="265"/>
@@ -158,13 +158,13 @@
             <p14:sldId id="267"/>
           </p14:sldIdLst>
         </p14:section>
-        <p14:section name="Processor and memory" id="{45fc9fbc-5b26-f9d8-e4f8-4592e3ffe471}">
+        <p14:section name="Processor and memory" id="{fea4dc6d-42e8-8b6d-85e6-fce339012423}">
           <p14:sldIdLst>
             <p14:sldId id="268"/>
             <p14:sldId id="269"/>
           </p14:sldIdLst>
         </p14:section>
-        <p14:section name="Memory and input/output" id="{fd50d3b3-04fa-5cb2-fc51-cb8acef25790}">
+        <p14:section name="Memory and input/output" id="{7de0179c-9d10-7f21-113d-e869e7bef103}">
           <p14:sldIdLst>
             <p14:sldId id="270"/>
             <p14:sldId id="271"/>

--- a/en/slides/15-Computer_Architecture-Memory.pptx
+++ b/en/slides/15-Computer_Architecture-Memory.pptx
@@ -126,31 +126,31 @@
   <p:extLst>
     <p:ext uri="{521415D9-36F7-43E2-AB2F-B90AF26B5E84}">
       <p14:sectionLst xmlns:p14="http://schemas.microsoft.com/office/powerpoint/2010/main">
-        <p14:section name="Opening" id="{879a4a60-59ce-fc88-d949-4b0f9bb1bdf2}">
+        <p14:section name="Opening" id="{82aa8d70-076f-661f-8a25-a6b4b06192e6}">
           <p14:sldIdLst>
             <p14:sldId id="256"/>
             <p14:sldId id="257"/>
           </p14:sldIdLst>
         </p14:section>
-        <p14:section name="What is a memory?" id="{c54148a3-69ad-cd91-8383-85977807517a}">
+        <p14:section name="What is a memory?" id="{14e9fb25-ae4a-649b-d30a-07575e5019d7}">
           <p14:sldIdLst>
             <p14:sldId id="258"/>
             <p14:sldId id="259"/>
           </p14:sldIdLst>
         </p14:section>
-        <p14:section name="A little history" id="{ec8fdffa-d0de-dbcd-0295-95e20d1ce4aa}">
+        <p14:section name="A little history" id="{00554074-7be7-6695-0309-e40803d4a0b8}">
           <p14:sldIdLst>
             <p14:sldId id="260"/>
             <p14:sldId id="261"/>
           </p14:sldIdLst>
         </p14:section>
-        <p14:section name="Memory today" id="{a0172c68-d291-da8c-0d26-662d230df4a6}">
+        <p14:section name="Memory today" id="{0946af72-d955-83a2-9113-ff9821d7aad9}">
           <p14:sldIdLst>
             <p14:sldId id="262"/>
             <p14:sldId id="263"/>
           </p14:sldIdLst>
         </p14:section>
-        <p14:section name="The main memory" id="{99021003-2ff5-fb86-bac5-c0d19153bc1a}">
+        <p14:section name="The main memory" id="{24686066-cc85-4005-7de7-572837a8f249}">
           <p14:sldIdLst>
             <p14:sldId id="264"/>
             <p14:sldId id="265"/>
@@ -158,13 +158,13 @@
             <p14:sldId id="267"/>
           </p14:sldIdLst>
         </p14:section>
-        <p14:section name="Processor and memory" id="{fea4dc6d-42e8-8b6d-85e6-fce339012423}">
+        <p14:section name="Processor and memory" id="{04282c35-6055-955c-8db2-96283280a423}">
           <p14:sldIdLst>
             <p14:sldId id="268"/>
             <p14:sldId id="269"/>
           </p14:sldIdLst>
         </p14:section>
-        <p14:section name="Memory and input/output" id="{7de0179c-9d10-7f21-113d-e869e7bef103}">
+        <p14:section name="Memory and input/output" id="{512de281-598a-e8ec-c8ba-15e604c013b1}">
           <p14:sldIdLst>
             <p14:sldId id="270"/>
             <p14:sldId id="271"/>
@@ -578,7 +578,7 @@
           <a:p>
             <a:r>
               <a:rPr lang="en-US" dirty="0"/>
-              <a:t>You have used memory since the second lecture: every lw and sw reads or writes it. This lecture explains what a memory is, how it is organised, and what actually happens between the processor and the memory when a load is executed. The picture on the cover is the debugger of PRG32-QT, whose memory view will serve as your microscope. The quotation from Tron is a joke with a serious side: a machine with memory can keep a state, and with a state it can do almost anything.
+              <a:t>Memory has been in use since the second lecture: every lw and sw reads or writes it. This lecture explains what a memory is, how it is organised, and what actually takes place between processor and memory when a load executes. The cover shows the PRG32-QT debugger, whose memory view serves as the instrument of observation throughout. The epigraph from Tron is playful but makes a serious point: a machine with memory can retain a state, and with state it can do almost anything, as the previous two lectures established.
 Learning status: UNDERSTAND NOW, by the end of this lecture you explain it, trace it and apply it on your own; USE NOW, you follow and use the recipe today; how it works inside is explained later, or is not part of the course; UNDERSTAND LATER, recognise the name and what it is for; a later lecture explains it. A slide without a badge is context: a story, an example, a question, an exercise.
 Learning status of this lecture. UNDERSTAND NOW: memories and addresses; little-endian byte order; processor and memory; memory-mapped I/O. USE NOW: the complete program, the PRG32 tools (used, not studied, in this course). UNDERSTAND LATER: nothing. A slide without a badge is context: a story, an example, a question, an exercise.
 For the lecturer: Spiral: lw and lbu on the same word show byte addresses and byte order on a real RISC-V machine; the lecture then explains what a memory is, how it is organised and how the processor talks to it. The original deck used the MC68000 (big-endian, no misaligned words) as its example: RISC-V takes its place.</a:t>
@@ -669,7 +669,7 @@
           <a:p>
             <a:r>
               <a:rPr lang="en-US" dirty="0"/>
-              <a:t>In a byte-addressable memory the smallest unit with an address is the byte. A word of 32 bits therefore occupies four consecutive addresses, and its address is that of its first byte. The strip shows the word of the warm-up followed by three characters. Two consequences that you have already met: the program counter advances by 4 from one instruction to the next, and the index of an array of words is multiplied by 4. RISC-V has loads and stores for each size: bytes, halfwords and words.
+              <a:t>In a byte-addressable memory the smallest addressable unit is the byte. A 32-bit word therefore occupies four consecutive addresses, and its address is that of its first byte. The strip shows the word of the warm-up followed by three characters. Two consequences have already been encountered: the program counter advances by 4 from one instruction to the next, and the index into an array of words is multiplied by 4. RISC-V provides loads and stores for each size: bytes, halfwords and words.
 UNDERSTAND NOW: memories and addresses.
 For the lecturer: Each cell is one byte of eight bits, from the most significant (bit 7) to the least significant (bit 0).</a:t>
             </a:r>
@@ -759,7 +759,7 @@
           <a:p>
             <a:r>
               <a:rPr lang="en-US" dirty="0"/>
-              <a:t>The two orders of the bytes of a word. Little-endian: the least significant byte at the lowest address. Big-endian: the most significant byte first. The same word, 0x10A3E6FF, is shown stored in the two ways. RISC-V is little-endian, like almost every processor in use today; network protocols, for historical reasons, send data big-endian. You notice the difference when you look at memory byte by byte, or when two different machines exchange binary data.
+              <a:t>The two orderings of the bytes of a word. Little-endian: the least significant byte at the lowest address. Big-endian: the most significant byte first. The same word, 0x10A3E6FF, is shown stored both ways. RISC-V is little-endian, like nearly every processor in current use; network protocols, for historical reasons, transmit data big-endian. The distinction becomes visible when memory is inspected byte by byte, or when two machines of different convention exchange binary data. The byte-order slide of Lecture 04 is here completed and turned into an experiment.
 UNDERSTAND NOW: little-endian byte order.
 For the lecturer: The original deck contrasted the MC68000 (big-endian) with Intel x86 (little-endian); the example values are the same. Also called diretto (little) and inverso (big).</a:t>
             </a:r>
@@ -849,7 +849,7 @@
           <a:p>
             <a:r>
               <a:rPr lang="en-US" dirty="0"/>
-              <a:t>Two parameters describe a memory: the capacity, the number of locations and the bits of each, and the access time. The numbers of the kit are worth remembering: 512 KB of SRAM, 320 KB of ROM, and an external flash of a few megabytes. Of these, the PRG32 menu tells you what is left for your programs: about 98 KB of RAM and 509 KB of flash for cartridges. It is eight times a Commodore 64, and a tiny fraction of a laptop.
+              <a:t>Two parameters characterise a memory: its capacity, the number of locations and the number of bits in each, and its access time. The figures for the kit are worth retaining: 512 KB of SRAM, 320 KB of ROM, and an external flash of a few megabytes. Of these, the PRG32 menu reports what remains available to programs: about 98 KB of RAM and 509 KB of flash for cartridges. This is eight times the memory of a Commodore 64, and a minute fraction of a laptop's.
 UNDERSTAND NOW: memories and addresses.
 For the lecturer: Values from the ESP32-C6 datasheet and from the PRG32 setup screen (RAM 98K, CART FLASH 509K, CART RAM 32K). A Commodore 64 had 64 KB in all.</a:t>
             </a:r>
@@ -939,7 +939,7 @@
           <a:p>
             <a:r>
               <a:rPr lang="en-US" dirty="0"/>
-              <a:t>The interface. Inside the processor two registers face the memory: MA, the memory address register, and MB, the memory buffer register. Three groups of lines connect them to the memory: the address bus, which goes one way, from the processor to the memory; the data bus, which goes both ways; and the control lines, read enable and write enable, which say what is being requested. MA and MB belong to the model of the processor: they are not among the registers you use in assembly.
+              <a:t>The interface. Within the processor two registers face the memory: MA, the memory address register, and MB, the memory buffer register. Three groups of lines connect them to the memory: the address bus, unidirectional, from processor to memory; the data bus, bidirectional; and the control lines, read enable and write enable, which specify the operation requested. MA and MB belong to the reference model of the processor of Lecture 18; they are internal and do not appear among the registers available in assembly.
 UNDERSTAND NOW: processor and memory.
 For the lecturer: MA and MB are internal registers of the textbook processor model (Lecture 18): they are not among the thirty-two registers a RISC-V programmer sees.</a:t>
             </a:r>
@@ -1029,7 +1029,7 @@
           <a:p>
             <a:r>
               <a:rPr lang="en-US" dirty="0"/>
-              <a:t>How do the processor and the memory agree on when the datum is ready? In the asynchronous technique the memory signals with a line when it has finished, and the processor waits: more complex, but the two can be designed independently. In the synchronous technique a clock paces the operation, which completes within a cycle whose length is chosen according to the speed of the memory: simpler, and the rule inside a single chip.
+              <a:t>How do processor and memory agree on when the datum is ready? In the asynchronous technique the memory signals completion on a dedicated line and the processor waits; the scheme is more complex, but the two can be designed independently. In the synchronous technique a clock paces the operation, which completes within a cycle whose length is chosen according to the speed of the memory; the scheme is simpler, and it is the rule within a single chip.
 UNDERSTAND NOW: processor and memory.
 For the lecturer: The read/write operation itself can be coded in different ways, for example a single R/W line qualified by an enable.</a:t>
             </a:r>
@@ -1119,7 +1119,7 @@
           <a:p>
             <a:r>
               <a:rPr lang="en-US" dirty="0"/>
-              <a:t>Two ways of connecting input and output. With a single bus, memory-mapped I/O, memory and devices share the same address space: a register of a device is read and written like a memory location, with no special instructions. With separate buses, isolated I/O, there are two address spaces and dedicated instructions. RISC-V follows the first way: it has no input or output instructions at all, only loads and stores.
+              <a:t>Two ways of attaching input and output. With a single bus, memory-mapped I/O, memory and devices share one address space, and a device register is read and written like any memory location, with no special instructions. With separate buses, isolated I/O, there are two address spaces and dedicated instructions. RISC-V adopts the first approach: it has no input or output instructions whatever, only loads and stores. The uniformity simplifies the instruction set at the cost of reserving part of the address space.
 UNDERSTAND NOW: memory-mapped I/O.
 For the lecturer: The I/O subsystem lets the processor interact with input devices (keyboard, mouse), output devices (screen, printer) and input/output devices (mass storage, network cards, serial ports).</a:t>
             </a:r>
@@ -1209,7 +1209,7 @@
           <a:p>
             <a:r>
               <a:rPr lang="en-US" dirty="0"/>
-              <a:t>The bus is in fact three buses: data, address and control. One more mechanism completes the picture. With direct memory access, DMA, a device exchanges whole blocks of data with the memory directly: the processor starts the transfer and is told when it is over, without copying each word itself. The display of the kit receives every frame in this way, and so does the audio amplifier.
+              <a:t>The bus is in fact three buses: data, address and control. One further mechanism completes the picture. With direct memory access, DMA, a device exchanges entire blocks of data with memory directly: the processor initiates the transfer and is notified on completion, without copying each word itself. The display of the kit receives every frame in this way, and so does the audio amplifier. Lecture 21 places DMA among the three ways of dealing with a device.
 UNDERSTAND NOW: memory-mapped I/O.
 For the lecturer: If several units share the bus and can access the memory directly, a DMA controller arbitrates. On the ESP32-C6 the SPI and I2S peripherals use DMA to stream the frame buffer and the audio samples.</a:t>
             </a:r>
@@ -1299,8 +1299,8 @@
           <a:p>
             <a:r>
               <a:rPr lang="en-US" dirty="0"/>
-              <a:t>Sixteen address lines select 2 to the 16 locations, and each location is one byte. Remember that 2 to the 10 is 1,024, a kibibyte.
-Little-endian: which byte of 0xCAFE0001 is the least significant? That byte is at the lowest address, and lbu with offset 0 reads it.
+              <a:t>For the first question: sixteen address lines select 2^16 locations, each of one byte, and 2^10 = 1,024 bytes is one kibibyte.
+For the second: in little-endian order the question is which byte of 0xCAFE0001 is the least significant. That byte occupies the lowest address, and lbu with offset 0 reads it.
 For the lecturer: 1. Answer: C. 2^16 = 65,536 locations of one byte: 64 KiB, the address space of a Commodore 64.
 2. Answer: D. Little-endian: the least significant byte, 0x01, is at the lowest address.</a:t>
             </a:r>
@@ -1390,8 +1390,8 @@
           <a:p>
             <a:r>
               <a:rPr lang="en-US" dirty="0"/>
-              <a:t>Recall how DRAM stores a bit: a charge in a tiny capacitor. What happens to a charge left alone? The refresh has nothing to do with speed or with random access.
-RISC-V has no out instruction and no thirty-third register. Devices have addresses, and a program reaches them with the instructions it uses for memory.
+              <a:t>For the first question one recalls how DRAM stores a bit, as a charge in a tiny capacitor, and asks what becomes of a charge left to itself. Refresh concerns neither speed nor random access.
+For the second: RISC-V has no out instruction and no thirty-third register. Devices have addresses, and a program reaches them with the same instructions it uses for memory.
 For the lecturer: 1. Answer: A. Each bit is a charge in a capacitor that leaks away; a circuit inside the memory rewrites every cell periodically.
 2. Answer: B. RISC-V has no I/O instructions: devices are memory-mapped and reached with ordinary loads and stores.</a:t>
             </a:r>
@@ -1481,7 +1481,7 @@
           <a:p>
             <a:r>
               <a:rPr lang="en-US" dirty="0"/>
-              <a:t>Ten terms. Main memory is memoria centrale. Access time is tempo di accesso. A magnetic core is a nucleo di ferrite. Refresh is the periodic rewriting of a DRAM. Memory-mapped I/O is input/output reached through memory addresses. The address bus and the data bus are the two main groups of lines of the interface.</a:t>
+              <a:t>Ten terms. Main memory is memoria centrale. Access time is tempo di accesso. A magnetic core is a nucleo di ferrite. Refresh is the periodic rewriting of a DRAM. Memory-mapped I/O is input/output accessed through memory addresses. The address bus and the data bus are the two principal groups of lines of the interface.</a:t>
             </a:r>
             <a:endParaRPr lang="en-US" dirty="0"/>
           </a:p>
@@ -1569,7 +1569,7 @@
           <a:p>
             <a:r>
               <a:rPr lang="en-US" dirty="0"/>
-              <a:t>Six objectives. Classify memories as volatile or persistent, on-line or off-line, and place them in a hierarchy. Describe how SRAM and DRAM store a bit and why they have different uses. Explain words, addresses and byte-addressable memory. Tell little-endian from big-endian order. Describe step by step how the processor reads and writes a word. And explain what memory-mapped input/output and DMA are.</a:t>
+              <a:t>Six learning outcomes. Classifying memories as volatile or persistent, on-line or off-line, and placing them in a hierarchy. Describing how SRAM and DRAM store a bit and why they serve different purposes. Explaining words, addresses and byte-addressable memory. Distinguishing little-endian from big-endian ordering. Describing step by step how the processor reads and writes a word. And explaining memory-mapped input/output and DMA.</a:t>
             </a:r>
             <a:endParaRPr lang="en-US" dirty="0"/>
           </a:p>
@@ -1657,7 +1657,7 @@
           <a:p>
             <a:r>
               <a:rPr lang="en-US" dirty="0"/>
-              <a:t>Five conclusions. Memory is the component that keeps the state of data. Different kinds serve different purposes, because none is fast, large and cheap together. Data are stored as words with addresses; RISC-V addresses bytes and orders them little-endian. Access happens by selection on the address bus, transfer on the data bus and control lines. And in RISC-V devices are reached like memory. The next lecture treats the memory that survives when the power is off, and the cache.
+              <a:t>Five conclusions. Memory is the component that retains the state of data. Different kinds serve different purposes, because none is fast, large and cheap at once. Data are stored as addressed words; RISC-V addresses individual bytes and orders them little-endian. An access proceeds by selection on the address bus, transfer on the data bus, and coordination through the control lines. And in RISC-V devices are reached exactly as memory is. The next lecture treats memory that survives the removal of power, together with the cache.
 Learning status, recap. UNDERSTAND NOW: memories and addresses; little-endian byte order; processor and memory; memory-mapped I/O. USE NOW: the complete program, the PRG32 tools (used, not studied, in this course). UNDERSTAND LATER: nothing. A slide without a badge is context: a story, an example, a question, an exercise.
 For the lecturer: Next lecture: permanent memory and the cache.</a:t>
             </a:r>
@@ -1747,7 +1747,7 @@
           <a:p>
             <a:r>
               <a:rPr lang="en-US" dirty="0"/>
-              <a:t>Memory is the part of a computer dedicated to keeping data and the instructions of programs. Two distinctions classify it. Volatile memories keep the information only while the machine is powered; persistent ones keep it when it is switched off. On-line means that the data are always accessible; off-line means that a medium must first be mounted, like a tape taken from a shelf.
+              <a:t>Memory is the part of a computer dedicated to retaining data and the instructions of programs. Two distinctions classify it. Volatile memories retain information only while powered; persistent ones retain it when power is removed. On-line means that the data are always accessible; off-line means that a medium must first be mounted, as a tape taken from a shelf.
 UNDERSTAND NOW: memories and addresses.</a:t>
             </a:r>
             <a:endParaRPr lang="en-US" dirty="0"/>
@@ -1836,7 +1836,7 @@
           <a:p>
             <a:r>
               <a:rPr lang="en-US" dirty="0"/>
-              <a:t>The memory hierarchy. At the top the registers, inside the processor; then the cache, the main memory, solid-state and magnetic disks, and finally tapes and removable media. Going up, memories are faster and more expensive per bit; going down, larger and cheaper. The upper levels are volatile, the lower ones persistent. The last line explains why the hierarchy exists: no single technology is fast, large and cheap at once, so a computer combines several.
+              <a:t>The memory hierarchy. At the top are the registers, within the processor; then the cache, main memory, solid-state and magnetic disks, and finally tapes and removable media. Moving upwards, memories become faster and more expensive per bit; moving downwards, larger and cheaper. The upper levels are volatile, the lower ones persistent. The last line states the reason for the hierarchy: no single technology is simultaneously fast, large and inexpensive, so a computer combines several and exploits the locality of programs to make the combination behave almost as well as the fastest level.
 UNDERSTAND NOW: memories and addresses.
 For the lecturer: Tipologie di memoria. Typical access times: registers and cache below a nanosecond to a few nanoseconds; DRAM tens of nanoseconds; SSD tens of microseconds; magnetic disks milliseconds; tape seconds to minutes.</a:t>
             </a:r>
@@ -1926,7 +1926,7 @@
           <a:p>
             <a:r>
               <a:rPr lang="en-US" dirty="0"/>
-              <a:t>In a magnetic-core memory each bit is a small ring of ferrite, and its value is the direction of the magnetic field in the ring. It was the main memory of the computers of the 1950s and 1960s, and it kept its content without power. The research began with An Wang at Harvard in 1949; Jay Forrester at MIT made it practical for the Whirlwind computer. Look at the photograph: every ring is threaded by wires, and one ring is one bit.
+              <a:t>In a magnetic-core memory each bit is a small ferrite ring, and its value is the direction of magnetisation of the ring. It was the main memory of the computers of the 1950s and 1960s, and it retained its content without power. The research began with An Wang at Harvard in 1949; Jay Forrester at MIT made it practical for the Whirlwind computer. In the photograph each ring is threaded by wires, and each ring is one bit.
 For the lecturer: Memorie a nuclei di ferrite. Wang's pulse transfer controlling device used a magnetic field to control an electromechanical system.
 Pictures: HP 9101A extended memory unit.- magnetic core memory module - macro detail.jpg, Mister rf, CC BY-SA 4.0, Wikimedia Commons.</a:t>
             </a:r>
@@ -2016,7 +2016,7 @@
           <a:p>
             <a:r>
               <a:rPr lang="en-US" dirty="0"/>
-              <a:t>How a core is read and written. Two wires, X and Y, select one ring. Reading sets the selected bit to 0: if it contained a 1 a pulse appears on the sense wire, otherwise nothing. So reading destroys the content, and every read is followed by a write that stores the datum again. Writing sets the selected core to 1, unless an inhibit wire prevents it. Keep the idea of the destructive read followed by a rewrite: it returns in today's DRAM.
+              <a:t>How a core is read and written. Two wires, X and Y, select one ring. Reading drives the selected core to 0: if it held a 1, a pulse appears on the sense wire, otherwise nothing does. Reading is therefore destructive, and every read must be followed by a write that restores the datum. Writing drives the selected core to 1 unless an inhibit wire prevents it. The pattern of destructive read followed by rewrite deserves to be remembered, because it recurs in contemporary DRAM.
 For the lecturer: Sense and inhibit share one wire (S|I). Destructive read followed by rewrite returns today in DRAM.</a:t>
             </a:r>
             <a:endParaRPr lang="en-US" dirty="0"/>
@@ -2105,7 +2105,7 @@
           <a:p>
             <a:r>
               <a:rPr lang="en-US" dirty="0"/>
-              <a:t>The two kinds of RAM. In static RAM each bit is held by a bistable circuit like those of Lecture 13: it keeps its value as long as there is power, it is fast, and it needs several transistors per bit, so it is expensive: it is used for caches. In dynamic RAM each bit is a charge in a tiny capacitor behind one transistor: it is dense and cheap, but the charge leaks away, so the content must be refreshed periodically: it is the main memory of laptops and phones. The chip of the kit has only SRAM.
+              <a:t>The two families of random-access memory. In static RAM each bit is held by a bistable circuit of the kind studied in Lecture 13: it retains its value as long as power is present, it is fast, and it requires several transistors per bit, which makes it costly; it is used for caches. In dynamic RAM each bit is a charge stored in a tiny capacitor behind a single transistor: it is dense and inexpensive, but the charge leaks away, so the content must be refreshed periodically; it is the main memory of laptops and phones. The chip of the kit contains only SRAM.
 UNDERSTAND NOW: memories and addresses.
 For the lecturer: DDR4 and DDR5 are generations of SDRAM. The ESP32-C6 has 512 KB of SRAM and no DRAM at all.</a:t>
             </a:r>
@@ -2195,7 +2195,7 @@
           <a:p>
             <a:r>
               <a:rPr lang="en-US" dirty="0"/>
-              <a:t>Other technologies. Ferroelectric RAM keeps its state without power. Flash memory is persistent and is erased in blocks: it is the memory of USB keys, phones and solid-state disks. One line concerns your kit directly: in a microcontroller the program lives in flash and the variables in SRAM. That is why your cartridges have a section of constants and a section of variables. The memory modules of a PC have gone, over the years, from a few megabytes to tens of gigabytes each.
+              <a:t>Other technologies. Ferroelectric RAM retains its state without power. Flash memory is persistent and is erased in blocks; it is the memory of USB keys, phones and solid-state disks, studied in Lecture 16. One line concerns the kit directly: in a microcontroller the program resides in flash and the variables in SRAM, which is why cartridges distinguish a section of constants from a section of variables. The memory modules of a PC have grown, over the decades, from a few megabytes to tens of gigabytes each.
 UNDERSTAND NOW: memories and addresses.
 For the lecturer: The module pictures of the original deck (SIMM EDO, SDRAM PC100 32 MB, PC133 64 MB, Rambus PC800 128 MB, DDR PC2100, ECC registered 256 MB) are summarised here. Flash and solid-state disks are treated in the next lecture.
 Pictures: Platinen-001 hg.jpg, Hannes Grobe, CC BY-SA 4.0, Wikimedia Commons.</a:t>
@@ -2286,7 +2286,7 @@
           <a:p>
             <a:r>
               <a:rPr lang="en-US" dirty="0"/>
-              <a:t>The main memory is an array of words, each a string of m bits that the processor reads or writes in a single operation. Each word has an address, a number from 0 to N minus 1 written on n bits, with N equal to 2 to the n. The address is a code word, and the memory decodes it. Random access means that the access time does not depend on the position: every word is reached equally fast. Thirty-two address bits give four gibibytes of addresses.
+              <a:t>Main memory is an array of words, each a string of m bits that the processor reads or writes in a single operation. Each word has an address, a number from 0 to N - 1 written on n bits, with N = 2^n. The address is a code word, and the memory decodes it exactly as the small memory of Lecture 14 did. Random access means that the access time does not depend on the position: every word is reached equally fast. Thirty-two address bits yield four gibibytes of addresses.
 UNDERSTAND NOW: memories and addresses.
 For the lecturer: Thirty-two address bits give 2^32 addresses: 4 GiB. The decoder of Lecture 11 and the small memory of Lecture 14, scaled up.</a:t>
             </a:r>
@@ -3366,7 +3366,7 @@
                 <a:ea typeface="Calibri" pitchFamily="34" charset="-122"/>
                 <a:cs typeface="Calibri" pitchFamily="34" charset="-120"/>
               </a:rPr>
-              <a:t>15-Computer_Architecture-Memory-Code.pptx</a:t>
+              <a:t>15-Computer_Architecture-Memory-Lab.pptx</a:t>
             </a:r>
             <a:endParaRPr lang="en-US" sz="1300" dirty="0"/>
           </a:p>

--- a/en/slides/15-Computer_Architecture-Memory.pptx
+++ b/en/slides/15-Computer_Architecture-Memory.pptx
@@ -126,31 +126,31 @@
   <p:extLst>
     <p:ext uri="{521415D9-36F7-43E2-AB2F-B90AF26B5E84}">
       <p14:sectionLst xmlns:p14="http://schemas.microsoft.com/office/powerpoint/2010/main">
-        <p14:section name="Opening" id="{82aa8d70-076f-661f-8a25-a6b4b06192e6}">
+        <p14:section name="Opening" id="{02304ada-500b-2ed6-ed4b-a2bc376aca11}">
           <p14:sldIdLst>
             <p14:sldId id="256"/>
             <p14:sldId id="257"/>
           </p14:sldIdLst>
         </p14:section>
-        <p14:section name="What is a memory?" id="{14e9fb25-ae4a-649b-d30a-07575e5019d7}">
+        <p14:section name="What is a memory?" id="{27dc2ff8-b7ac-7b63-cc71-13d72be4d02d}">
           <p14:sldIdLst>
             <p14:sldId id="258"/>
             <p14:sldId id="259"/>
           </p14:sldIdLst>
         </p14:section>
-        <p14:section name="A little history" id="{00554074-7be7-6695-0309-e40803d4a0b8}">
+        <p14:section name="A little history" id="{d7aadf80-586b-95c9-e3c0-21b4d59cd499}">
           <p14:sldIdLst>
             <p14:sldId id="260"/>
             <p14:sldId id="261"/>
           </p14:sldIdLst>
         </p14:section>
-        <p14:section name="Memory today" id="{0946af72-d955-83a2-9113-ff9821d7aad9}">
+        <p14:section name="Memory today" id="{5460c5bd-6e83-604e-914e-8e7b2639042a}">
           <p14:sldIdLst>
             <p14:sldId id="262"/>
             <p14:sldId id="263"/>
           </p14:sldIdLst>
         </p14:section>
-        <p14:section name="The main memory" id="{24686066-cc85-4005-7de7-572837a8f249}">
+        <p14:section name="The main memory" id="{40408b02-fe6b-226a-3d2c-b07d62d56764}">
           <p14:sldIdLst>
             <p14:sldId id="264"/>
             <p14:sldId id="265"/>
@@ -158,13 +158,13 @@
             <p14:sldId id="267"/>
           </p14:sldIdLst>
         </p14:section>
-        <p14:section name="Processor and memory" id="{04282c35-6055-955c-8db2-96283280a423}">
+        <p14:section name="Processor and memory" id="{88c22664-7c29-cf2b-3007-26ecb7c85c98}">
           <p14:sldIdLst>
             <p14:sldId id="268"/>
             <p14:sldId id="269"/>
           </p14:sldIdLst>
         </p14:section>
-        <p14:section name="Memory and input/output" id="{512de281-598a-e8ec-c8ba-15e604c013b1}">
+        <p14:section name="Memory and input/output" id="{9bf59610-e300-cfa2-1eca-4795e481fc9c}">
           <p14:sldIdLst>
             <p14:sldId id="270"/>
             <p14:sldId id="271"/>

--- a/en/slides/15-Computer_Architecture-Memory.pptx
+++ b/en/slides/15-Computer_Architecture-Memory.pptx
@@ -126,31 +126,31 @@
   <p:extLst>
     <p:ext uri="{521415D9-36F7-43E2-AB2F-B90AF26B5E84}">
       <p14:sectionLst xmlns:p14="http://schemas.microsoft.com/office/powerpoint/2010/main">
-        <p14:section name="Opening" id="{02304ada-500b-2ed6-ed4b-a2bc376aca11}">
+        <p14:section name="Opening" id="{16c6031b-31fb-3050-abc6-117983a84044}">
           <p14:sldIdLst>
             <p14:sldId id="256"/>
             <p14:sldId id="257"/>
           </p14:sldIdLst>
         </p14:section>
-        <p14:section name="What is a memory?" id="{27dc2ff8-b7ac-7b63-cc71-13d72be4d02d}">
+        <p14:section name="What is a memory?" id="{665e918d-6474-2f82-62a5-5d42fe1f68c2}">
           <p14:sldIdLst>
             <p14:sldId id="258"/>
             <p14:sldId id="259"/>
           </p14:sldIdLst>
         </p14:section>
-        <p14:section name="A little history" id="{d7aadf80-586b-95c9-e3c0-21b4d59cd499}">
+        <p14:section name="A little history" id="{58e57e5d-8a12-b898-bd16-feff9b540345}">
           <p14:sldIdLst>
             <p14:sldId id="260"/>
             <p14:sldId id="261"/>
           </p14:sldIdLst>
         </p14:section>
-        <p14:section name="Memory today" id="{5460c5bd-6e83-604e-914e-8e7b2639042a}">
+        <p14:section name="Memory today" id="{19c137ff-995f-fec8-2ceb-35654d7b95b3}">
           <p14:sldIdLst>
             <p14:sldId id="262"/>
             <p14:sldId id="263"/>
           </p14:sldIdLst>
         </p14:section>
-        <p14:section name="The main memory" id="{40408b02-fe6b-226a-3d2c-b07d62d56764}">
+        <p14:section name="The main memory" id="{461490df-1215-83dc-0dfe-3c1241fa6032}">
           <p14:sldIdLst>
             <p14:sldId id="264"/>
             <p14:sldId id="265"/>
@@ -158,13 +158,13 @@
             <p14:sldId id="267"/>
           </p14:sldIdLst>
         </p14:section>
-        <p14:section name="Processor and memory" id="{88c22664-7c29-cf2b-3007-26ecb7c85c98}">
+        <p14:section name="Processor and memory" id="{e53dc99d-5122-90c4-785b-f5768a2b1175}">
           <p14:sldIdLst>
             <p14:sldId id="268"/>
             <p14:sldId id="269"/>
           </p14:sldIdLst>
         </p14:section>
-        <p14:section name="Memory and input/output" id="{9bf59610-e300-cfa2-1eca-4795e481fc9c}">
+        <p14:section name="Memory and input/output" id="{436bef7d-7ed5-3219-3a95-84772ee9e7d8}">
           <p14:sldIdLst>
             <p14:sldId id="270"/>
             <p14:sldId id="271"/>
@@ -581,6 +581,8 @@
               <a:t>Memory has been in use since the second lecture: every lw and sw reads or writes it. This lecture explains what a memory is, how it is organised, and what actually takes place between processor and memory when a load executes. The cover shows the PRG32-QT debugger, whose memory view serves as the instrument of observation throughout. The epigraph from Tron is playful but makes a serious point: a machine with memory can retain a state, and with state it can do almost anything, as the previous two lectures established.
 Learning status: UNDERSTAND NOW, by the end of this lecture you explain it, trace it and apply it on your own; USE NOW, you follow and use the recipe today; how it works inside is explained later, or is not part of the course; UNDERSTAND LATER, recognise the name and what it is for; a later lecture explains it. A slide without a badge is context: a story, an example, a question, an exercise.
 Learning status of this lecture. UNDERSTAND NOW: memories and addresses; little-endian byte order; processor and memory; memory-mapped I/O. USE NOW: the complete program, the PRG32 tools (used, not studied, in this course). UNDERSTAND LATER: nothing. A slide without a badge is context: a story, an example, a question, an exercise.
+Roadmap. Today's outcomes: (1) compute the capacity of a memory from its address and data lines; (2) describe the interface between processor and memory during a load; (3) explain memory-mapped input/output. Builds on: little-endian byte order (Lecture 04). Next: Lecture 16, Permanent Memory.
+Bridge. Since Lecture 02, lw t1, 0(t0) has read a word at an address computed from t0. Today that address is the one placed on the address bus, register plus constant. Lecture 19 calls this base plus displacement and compares it with the other addressing modes. Recall: In lw t1, 8(t0), which address goes on the address bus?
 For the lecturer: Spiral: lw and lbu on the same word show byte addresses and byte order on a real RISC-V machine; the lecture then explains what a memory is, how it is organised and how the processor talks to it. The original deck used the MC68000 (big-endian, no misaligned words) as its example: RISC-V takes its place.</a:t>
             </a:r>
             <a:endParaRPr lang="en-US" dirty="0"/>
@@ -1658,7 +1660,7 @@
             <a:r>
               <a:rPr lang="en-US" dirty="0"/>
               <a:t>Five conclusions. Memory is the component that retains the state of data. Different kinds serve different purposes, because none is fast, large and cheap at once. Data are stored as addressed words; RISC-V addresses individual bytes and orders them little-endian. An access proceeds by selection on the address bus, transfer on the data bus, and coordination through the control lines. And in RISC-V devices are reached exactly as memory is. The next lecture treats memory that survives the removal of power, together with the cache.
-Learning status, recap. UNDERSTAND NOW: memories and addresses; little-endian byte order; processor and memory; memory-mapped I/O. USE NOW: the complete program, the PRG32 tools (used, not studied, in this course). UNDERSTAND LATER: nothing. A slide without a badge is context: a story, an example, a question, an exercise.
+Learning status, recap. UNDERSTAND NOW: memories and addresses; little-endian byte order; processor and memory; memory-mapped I/O. USE NOW: the complete program, the PRG32 tools (used, not studied, in this course). UNDERSTAND LATER: nothing. A slide without a badge is context: a story, an example, a question, an exercise. Closing thread: Every lw and sw of the course is a short dialogue on the address bus, the data bus and two control lines; a device answers on the same bus. Next: memory that survives without power, and caches. Exit ticket (two to four minutes, alone, on paper): 1. List, in order, what travels on the address bus, the control lines and the data bus while the processor executes lw t1, 0(t0). 2. RISC-V has no input/output instructions. How, then, does a program turn on an LED or send a pixel to a device?
 For the lecturer: Next lecture: permanent memory and the cache.</a:t>
             </a:r>
             <a:endParaRPr lang="en-US" dirty="0"/>
